--- a/Presentations/Module_7_Services_and_DI_Presentation.pptx
+++ b/Presentations/Module_7_Services_and_DI_Presentation.pptx
@@ -2,23 +2,26 @@
 <file path=ppt/presentation.xml><?xml version="1.0" encoding="utf-8"?>
 <p:presentation xmlns:p="http://schemas.openxmlformats.org/presentationml/2006/main">
   <p:sldMasterIdLst>
-    <p:sldMasterId xmlns:r="http://schemas.openxmlformats.org/officeDocument/2006/relationships" id="2147483648" r:id="R03f3867a40684710"/>
+    <p:sldMasterId xmlns:r="http://schemas.openxmlformats.org/officeDocument/2006/relationships" id="2147483648" r:id="Re8c3395c5cf04ba2"/>
   </p:sldMasterIdLst>
   <p:notesMasterIdLst>
-    <p:notesMasterId xmlns:r="http://schemas.openxmlformats.org/officeDocument/2006/relationships" r:id="R2dd2df19ce114aef"/>
+    <p:notesMasterId xmlns:r="http://schemas.openxmlformats.org/officeDocument/2006/relationships" r:id="R1cb6dec5b6744e4b"/>
   </p:notesMasterIdLst>
   <p:sldIdLst>
-    <p:sldId xmlns:r="http://schemas.openxmlformats.org/officeDocument/2006/relationships" id="256" r:id="R40b796c66bbf4470"/>
-    <p:sldId xmlns:r="http://schemas.openxmlformats.org/officeDocument/2006/relationships" id="257" r:id="R5c4e2bed962440f5"/>
-    <p:sldId xmlns:r="http://schemas.openxmlformats.org/officeDocument/2006/relationships" id="258" r:id="Rad78dde8a7a6429d"/>
-    <p:sldId xmlns:r="http://schemas.openxmlformats.org/officeDocument/2006/relationships" id="259" r:id="R912232c2e6f2410a"/>
-    <p:sldId xmlns:r="http://schemas.openxmlformats.org/officeDocument/2006/relationships" id="260" r:id="Rce9bdde1e6554f33"/>
-    <p:sldId xmlns:r="http://schemas.openxmlformats.org/officeDocument/2006/relationships" id="261" r:id="R3dde4ae6f9ae41b0"/>
-    <p:sldId xmlns:r="http://schemas.openxmlformats.org/officeDocument/2006/relationships" id="262" r:id="R224da8e396af44f8"/>
-    <p:sldId xmlns:r="http://schemas.openxmlformats.org/officeDocument/2006/relationships" id="263" r:id="R15b7909c65794668"/>
-    <p:sldId xmlns:r="http://schemas.openxmlformats.org/officeDocument/2006/relationships" id="264" r:id="R24b43ef08aa44596"/>
-    <p:sldId xmlns:r="http://schemas.openxmlformats.org/officeDocument/2006/relationships" id="265" r:id="R331c84b855ea4ea5"/>
-    <p:sldId xmlns:r="http://schemas.openxmlformats.org/officeDocument/2006/relationships" id="266" r:id="R2926439423f54df9"/>
+    <p:sldId xmlns:r="http://schemas.openxmlformats.org/officeDocument/2006/relationships" id="256" r:id="R7533043efc074cb2"/>
+    <p:sldId xmlns:r="http://schemas.openxmlformats.org/officeDocument/2006/relationships" id="257" r:id="R1906416a08e849ec"/>
+    <p:sldId xmlns:r="http://schemas.openxmlformats.org/officeDocument/2006/relationships" id="258" r:id="Rfa69cccf6534418a"/>
+    <p:sldId xmlns:r="http://schemas.openxmlformats.org/officeDocument/2006/relationships" id="259" r:id="Rd473bfe091674198"/>
+    <p:sldId xmlns:r="http://schemas.openxmlformats.org/officeDocument/2006/relationships" id="260" r:id="R4c18684cfd3a42bd"/>
+    <p:sldId xmlns:r="http://schemas.openxmlformats.org/officeDocument/2006/relationships" id="261" r:id="R5839772167b3417a"/>
+    <p:sldId xmlns:r="http://schemas.openxmlformats.org/officeDocument/2006/relationships" id="262" r:id="R707e0a2581064aa8"/>
+    <p:sldId xmlns:r="http://schemas.openxmlformats.org/officeDocument/2006/relationships" id="263" r:id="Ra456cef6edb0418a"/>
+    <p:sldId xmlns:r="http://schemas.openxmlformats.org/officeDocument/2006/relationships" id="264" r:id="R06d17082186a45c6"/>
+    <p:sldId xmlns:r="http://schemas.openxmlformats.org/officeDocument/2006/relationships" id="265" r:id="R7aef3918341a4384"/>
+    <p:sldId xmlns:r="http://schemas.openxmlformats.org/officeDocument/2006/relationships" id="266" r:id="R65f0ed0485f24293"/>
+    <p:sldId xmlns:r="http://schemas.openxmlformats.org/officeDocument/2006/relationships" id="267" r:id="Re83fb792329c4763"/>
+    <p:sldId xmlns:r="http://schemas.openxmlformats.org/officeDocument/2006/relationships" id="268" r:id="Rf1bdbb4550d14055"/>
+    <p:sldId xmlns:r="http://schemas.openxmlformats.org/officeDocument/2006/relationships" id="269" r:id="R08c29acae9804ca4"/>
   </p:sldIdLst>
   <p:sldSz cx="12192000" cy="6858000"/>
   <p:notesSz cx="6858000" cy="9144000"/>
@@ -579,7 +582,7 @@
           <a:lstStyle xmlns:a="http://schemas.openxmlformats.org/drawingml/2006/main"/>
           <a:p xmlns:a="http://schemas.openxmlformats.org/drawingml/2006/main">
             <a:r>
-              <a:t>Introduce Module 7. Open the matching Word tutorial after the exercise overview.</a:t>
+              <a:t>Open the matching Word tutorial after the exercise overview. Source: Module 7 Word tutorial.</a:t>
             </a:r>
           </a:p>
         </p:txBody>
@@ -649,7 +652,7 @@
           <a:lstStyle xmlns:a="http://schemas.openxmlformats.org/drawingml/2006/main"/>
           <a:p xmlns:a="http://schemas.openxmlformats.org/drawingml/2006/main">
             <a:r>
-              <a:t>After tutorial Step 4: run the app or inspect the code. Ask students to explain the observed result. Source: Module 7 Word tutorial.</a:t>
+              <a:t>After tutorial Step 3: run the app or inspect the code. Ask students to explain the observed result. Source: Module 7 Word tutorial.</a:t>
             </a:r>
           </a:p>
         </p:txBody>
@@ -719,7 +722,217 @@
           <a:lstStyle xmlns:a="http://schemas.openxmlformats.org/drawingml/2006/main"/>
           <a:p xmlns:a="http://schemas.openxmlformats.org/drawingml/2006/main">
             <a:r>
+              <a:t>Before tutorial Step 4: explain these concepts. Ask students to predict what the change will do. Then open Step 4 in the Word tutorial. Source: Module 7 Word tutorial. Related MAUI documentation: https://learn.microsoft.com/dotnet/maui/fundamentals/dependency-injection</a:t>
+            </a:r>
+          </a:p>
+        </p:txBody>
+      </p:sp>
+      <p:sp>
+        <p:nvSpPr>
+          <p:cNvPr id="4" name="Slide Number Placeholder 3"/>
+          <p:cNvSpPr>
+            <a:spLocks xmlns:a="http://schemas.openxmlformats.org/drawingml/2006/main" noGrp="1"/>
+          </p:cNvSpPr>
+          <p:nvPr>
+            <p:ph type="sldNum" idx="5"/>
+          </p:nvPr>
+        </p:nvSpPr>
+        <p:spPr/>
+        <p:txBody>
+          <a:bodyPr xmlns:a="http://schemas.openxmlformats.org/drawingml/2006/main"/>
+          <a:lstStyle xmlns:a="http://schemas.openxmlformats.org/drawingml/2006/main"/>
+          <a:p xmlns:a="http://schemas.openxmlformats.org/drawingml/2006/main"/>
+        </p:txBody>
+      </p:sp>
+    </p:spTree>
+  </p:cSld>
+  <p:clrMapOvr>
+    <a:masterClrMapping xmlns:a="http://schemas.openxmlformats.org/drawingml/2006/main"/>
+  </p:clrMapOvr>
+</p:notes>
+</file>
+
+<file path=ppt/notesSlides/notesSlide12.xml><?xml version="1.0" encoding="utf-8"?>
+<p:notes xmlns:p="http://schemas.openxmlformats.org/presentationml/2006/main">
+  <p:cSld>
+    <p:spTree>
+      <p:nvGrpSpPr>
+        <p:cNvPr id="1" name=""/>
+        <p:cNvGrpSpPr/>
+        <p:nvPr/>
+      </p:nvGrpSpPr>
+      <p:grpSpPr>
+        <a:xfrm xmlns:a="http://schemas.openxmlformats.org/drawingml/2006/main"/>
+      </p:grpSpPr>
+      <p:sp>
+        <p:nvSpPr>
+          <p:cNvPr id="2" name="Slide Image Placeholder 1"/>
+          <p:cNvSpPr>
+            <a:spLocks xmlns:a="http://schemas.openxmlformats.org/drawingml/2006/main" noGrp="1"/>
+          </p:cNvSpPr>
+          <p:nvPr>
+            <p:ph type="sldImg" idx="0"/>
+          </p:nvPr>
+        </p:nvSpPr>
+        <p:spPr/>
+      </p:sp>
+      <p:sp>
+        <p:nvSpPr>
+          <p:cNvPr id="3" name="Notes Placeholder 2"/>
+          <p:cNvSpPr>
+            <a:spLocks xmlns:a="http://schemas.openxmlformats.org/drawingml/2006/main" noGrp="1"/>
+          </p:cNvSpPr>
+          <p:nvPr>
+            <p:ph type="body" idx="1"/>
+          </p:nvPr>
+        </p:nvSpPr>
+        <p:spPr/>
+        <p:txBody>
+          <a:bodyPr xmlns:a="http://schemas.openxmlformats.org/drawingml/2006/main"/>
+          <a:lstStyle xmlns:a="http://schemas.openxmlformats.org/drawingml/2006/main"/>
+          <a:p xmlns:a="http://schemas.openxmlformats.org/drawingml/2006/main">
+            <a:r>
+              <a:t>After tutorial Step 4: run the app or inspect the code. Ask students to explain the observed result. Source: Module 7 Word tutorial.</a:t>
+            </a:r>
+          </a:p>
+        </p:txBody>
+      </p:sp>
+      <p:sp>
+        <p:nvSpPr>
+          <p:cNvPr id="4" name="Slide Number Placeholder 3"/>
+          <p:cNvSpPr>
+            <a:spLocks xmlns:a="http://schemas.openxmlformats.org/drawingml/2006/main" noGrp="1"/>
+          </p:cNvSpPr>
+          <p:nvPr>
+            <p:ph type="sldNum" idx="5"/>
+          </p:nvPr>
+        </p:nvSpPr>
+        <p:spPr/>
+        <p:txBody>
+          <a:bodyPr xmlns:a="http://schemas.openxmlformats.org/drawingml/2006/main"/>
+          <a:lstStyle xmlns:a="http://schemas.openxmlformats.org/drawingml/2006/main"/>
+          <a:p xmlns:a="http://schemas.openxmlformats.org/drawingml/2006/main"/>
+        </p:txBody>
+      </p:sp>
+    </p:spTree>
+  </p:cSld>
+  <p:clrMapOvr>
+    <a:masterClrMapping xmlns:a="http://schemas.openxmlformats.org/drawingml/2006/main"/>
+  </p:clrMapOvr>
+</p:notes>
+</file>
+
+<file path=ppt/notesSlides/notesSlide13.xml><?xml version="1.0" encoding="utf-8"?>
+<p:notes xmlns:p="http://schemas.openxmlformats.org/presentationml/2006/main">
+  <p:cSld>
+    <p:spTree>
+      <p:nvGrpSpPr>
+        <p:cNvPr id="1" name=""/>
+        <p:cNvGrpSpPr/>
+        <p:nvPr/>
+      </p:nvGrpSpPr>
+      <p:grpSpPr>
+        <a:xfrm xmlns:a="http://schemas.openxmlformats.org/drawingml/2006/main"/>
+      </p:grpSpPr>
+      <p:sp>
+        <p:nvSpPr>
+          <p:cNvPr id="2" name="Slide Image Placeholder 1"/>
+          <p:cNvSpPr>
+            <a:spLocks xmlns:a="http://schemas.openxmlformats.org/drawingml/2006/main" noGrp="1"/>
+          </p:cNvSpPr>
+          <p:nvPr>
+            <p:ph type="sldImg" idx="0"/>
+          </p:nvPr>
+        </p:nvSpPr>
+        <p:spPr/>
+      </p:sp>
+      <p:sp>
+        <p:nvSpPr>
+          <p:cNvPr id="3" name="Notes Placeholder 2"/>
+          <p:cNvSpPr>
+            <a:spLocks xmlns:a="http://schemas.openxmlformats.org/drawingml/2006/main" noGrp="1"/>
+          </p:cNvSpPr>
+          <p:nvPr>
+            <p:ph type="body" idx="1"/>
+          </p:nvPr>
+        </p:nvSpPr>
+        <p:spPr/>
+        <p:txBody>
+          <a:bodyPr xmlns:a="http://schemas.openxmlformats.org/drawingml/2006/main"/>
+          <a:lstStyle xmlns:a="http://schemas.openxmlformats.org/drawingml/2006/main"/>
+          <a:p xmlns:a="http://schemas.openxmlformats.org/drawingml/2006/main">
+            <a:r>
               <a:t>Use the final tutorial checklist. Ask students to explain the module concept without reading code. Source: Module 7 Word tutorial.</a:t>
+            </a:r>
+          </a:p>
+        </p:txBody>
+      </p:sp>
+      <p:sp>
+        <p:nvSpPr>
+          <p:cNvPr id="4" name="Slide Number Placeholder 3"/>
+          <p:cNvSpPr>
+            <a:spLocks xmlns:a="http://schemas.openxmlformats.org/drawingml/2006/main" noGrp="1"/>
+          </p:cNvSpPr>
+          <p:nvPr>
+            <p:ph type="sldNum" idx="5"/>
+          </p:nvPr>
+        </p:nvSpPr>
+        <p:spPr/>
+        <p:txBody>
+          <a:bodyPr xmlns:a="http://schemas.openxmlformats.org/drawingml/2006/main"/>
+          <a:lstStyle xmlns:a="http://schemas.openxmlformats.org/drawingml/2006/main"/>
+          <a:p xmlns:a="http://schemas.openxmlformats.org/drawingml/2006/main"/>
+        </p:txBody>
+      </p:sp>
+    </p:spTree>
+  </p:cSld>
+  <p:clrMapOvr>
+    <a:masterClrMapping xmlns:a="http://schemas.openxmlformats.org/drawingml/2006/main"/>
+  </p:clrMapOvr>
+</p:notes>
+</file>
+
+<file path=ppt/notesSlides/notesSlide14.xml><?xml version="1.0" encoding="utf-8"?>
+<p:notes xmlns:p="http://schemas.openxmlformats.org/presentationml/2006/main">
+  <p:cSld>
+    <p:spTree>
+      <p:nvGrpSpPr>
+        <p:cNvPr id="1" name=""/>
+        <p:cNvGrpSpPr/>
+        <p:nvPr/>
+      </p:nvGrpSpPr>
+      <p:grpSpPr>
+        <a:xfrm xmlns:a="http://schemas.openxmlformats.org/drawingml/2006/main"/>
+      </p:grpSpPr>
+      <p:sp>
+        <p:nvSpPr>
+          <p:cNvPr id="2" name="Slide Image Placeholder 1"/>
+          <p:cNvSpPr>
+            <a:spLocks xmlns:a="http://schemas.openxmlformats.org/drawingml/2006/main" noGrp="1"/>
+          </p:cNvSpPr>
+          <p:nvPr>
+            <p:ph type="sldImg" idx="0"/>
+          </p:nvPr>
+        </p:nvSpPr>
+        <p:spPr/>
+      </p:sp>
+      <p:sp>
+        <p:nvSpPr>
+          <p:cNvPr id="3" name="Notes Placeholder 2"/>
+          <p:cNvSpPr>
+            <a:spLocks xmlns:a="http://schemas.openxmlformats.org/drawingml/2006/main" noGrp="1"/>
+          </p:cNvSpPr>
+          <p:nvPr>
+            <p:ph type="body" idx="1"/>
+          </p:nvPr>
+        </p:nvSpPr>
+        <p:spPr/>
+        <p:txBody>
+          <a:bodyPr xmlns:a="http://schemas.openxmlformats.org/drawingml/2006/main"/>
+          <a:lstStyle xmlns:a="http://schemas.openxmlformats.org/drawingml/2006/main"/>
+          <a:p xmlns:a="http://schemas.openxmlformats.org/drawingml/2006/main">
+            <a:r>
+              <a:t>Student reading: Dependency injection. https://learn.microsoft.com/dotnet/maui/fundamentals/dependency-injection</a:t>
             </a:r>
           </a:p>
         </p:txBody>
@@ -789,7 +1002,7 @@
           <a:lstStyle xmlns:a="http://schemas.openxmlformats.org/drawingml/2006/main"/>
           <a:p xmlns:a="http://schemas.openxmlformats.org/drawingml/2006/main">
             <a:r>
-              <a:t>Explain the work for Module 7. Show the expected app result before students start. Source: Module 7 Word tutorial.</a:t>
+              <a:t>Give students the outcome before they start. Source: Module 7 Word tutorial.</a:t>
             </a:r>
           </a:p>
         </p:txBody>
@@ -859,7 +1072,7 @@
           <a:lstStyle xmlns:a="http://schemas.openxmlformats.org/drawingml/2006/main"/>
           <a:p xmlns:a="http://schemas.openxmlformats.org/drawingml/2006/main">
             <a:r>
-              <a:t>Before tutorial Step 1: explain these concepts. Ask students to predict what the change will do. Then open Step 1 in the Word tutorial. Source: Module 7 Word tutorial.</a:t>
+              <a:t>Explain the framework idea before the first exercise step. MAUI documentation: https://learn.microsoft.com/dotnet/maui/fundamentals/dependency-injection</a:t>
             </a:r>
           </a:p>
         </p:txBody>
@@ -929,7 +1142,7 @@
           <a:lstStyle xmlns:a="http://schemas.openxmlformats.org/drawingml/2006/main"/>
           <a:p xmlns:a="http://schemas.openxmlformats.org/drawingml/2006/main">
             <a:r>
-              <a:t>After tutorial Step 1: run the app or inspect the code. Ask students to explain the observed result. Source: Module 7 Word tutorial.</a:t>
+              <a:t>Ask students to identify the C# object, the XAML control, and the connection between them. Source: Module 7 Word tutorial. MAUI documentation: https://learn.microsoft.com/dotnet/maui/fundamentals/dependency-injection</a:t>
             </a:r>
           </a:p>
         </p:txBody>
@@ -999,7 +1212,7 @@
           <a:lstStyle xmlns:a="http://schemas.openxmlformats.org/drawingml/2006/main"/>
           <a:p xmlns:a="http://schemas.openxmlformats.org/drawingml/2006/main">
             <a:r>
-              <a:t>Before tutorial Step 2: explain these concepts. Ask students to predict what the change will do. Then open Step 2 in the Word tutorial. Source: Module 7 Word tutorial.</a:t>
+              <a:t>Before tutorial Step 1: explain these concepts. Ask students to predict what the change will do. Then open Step 1 in the Word tutorial. Source: Module 7 Word tutorial. Related MAUI documentation: https://learn.microsoft.com/dotnet/maui/fundamentals/dependency-injection</a:t>
             </a:r>
           </a:p>
         </p:txBody>
@@ -1069,7 +1282,7 @@
           <a:lstStyle xmlns:a="http://schemas.openxmlformats.org/drawingml/2006/main"/>
           <a:p xmlns:a="http://schemas.openxmlformats.org/drawingml/2006/main">
             <a:r>
-              <a:t>After tutorial Step 2: run the app or inspect the code. Ask students to explain the observed result. Source: Module 7 Word tutorial.</a:t>
+              <a:t>After tutorial Step 1: run the app or inspect the code. Ask students to explain the observed result. Source: Module 7 Word tutorial.</a:t>
             </a:r>
           </a:p>
         </p:txBody>
@@ -1139,7 +1352,7 @@
           <a:lstStyle xmlns:a="http://schemas.openxmlformats.org/drawingml/2006/main"/>
           <a:p xmlns:a="http://schemas.openxmlformats.org/drawingml/2006/main">
             <a:r>
-              <a:t>Before tutorial Step 3: explain these concepts. Ask students to predict what the change will do. Then open Step 3 in the Word tutorial. Source: Module 7 Word tutorial.</a:t>
+              <a:t>Before tutorial Step 2: explain these concepts. Ask students to predict what the change will do. Then open Step 2 in the Word tutorial. Source: Module 7 Word tutorial. Related MAUI documentation: https://learn.microsoft.com/dotnet/maui/fundamentals/dependency-injection</a:t>
             </a:r>
           </a:p>
         </p:txBody>
@@ -1209,7 +1422,7 @@
           <a:lstStyle xmlns:a="http://schemas.openxmlformats.org/drawingml/2006/main"/>
           <a:p xmlns:a="http://schemas.openxmlformats.org/drawingml/2006/main">
             <a:r>
-              <a:t>After tutorial Step 3: run the app or inspect the code. Ask students to explain the observed result. Source: Module 7 Word tutorial.</a:t>
+              <a:t>After tutorial Step 2: run the app or inspect the code. Ask students to explain the observed result. Source: Module 7 Word tutorial.</a:t>
             </a:r>
           </a:p>
         </p:txBody>
@@ -1279,7 +1492,7 @@
           <a:lstStyle xmlns:a="http://schemas.openxmlformats.org/drawingml/2006/main"/>
           <a:p xmlns:a="http://schemas.openxmlformats.org/drawingml/2006/main">
             <a:r>
-              <a:t>Before tutorial Step 4: explain these concepts. Ask students to predict what the change will do. Then open Step 4 in the Word tutorial. Source: Module 7 Word tutorial.</a:t>
+              <a:t>Before tutorial Step 3: explain these concepts. Ask students to predict what the change will do. Then open Step 3 in the Word tutorial. Source: Module 7 Word tutorial. Related MAUI documentation: https://learn.microsoft.com/dotnet/maui/fundamentals/dependency-injection</a:t>
             </a:r>
           </a:p>
         </p:txBody>
@@ -1389,7 +1602,7 @@
           <p:cNvPr id="14" name="Picture 13">
             <a:extLst xmlns:a="http://schemas.openxmlformats.org/drawingml/2006/main">
               <a:ext uri="{FF2B5EF4-FFF2-40B4-BE49-F238E27FC236}">
-                <a16:creationId xmlns:a16="http://schemas.microsoft.com/office/drawing/2014/main" id="{E2BC5D85-7D4B-4F9C-8D6E-2213B45C6BB6}"/>
+                <a16:creationId xmlns:a16="http://schemas.microsoft.com/office/drawing/2014/main" id="{11E9A036-6C78-48A9-BE3C-26A78D159032}"/>
               </a:ext>
             </a:extLst>
           </p:cNvPr>
@@ -1399,7 +1612,7 @@
           <p:nvPr/>
         </p:nvPicPr>
         <p:blipFill>
-          <a:blip xmlns:r="http://schemas.openxmlformats.org/officeDocument/2006/relationships" xmlns:a="http://schemas.openxmlformats.org/drawingml/2006/main" r:embed="R42f954e03fc54c9c">
+          <a:blip xmlns:r="http://schemas.openxmlformats.org/officeDocument/2006/relationships" xmlns:a="http://schemas.openxmlformats.org/drawingml/2006/main" r:embed="Reea3ebd8502f4272">
             <a:alphaModFix amt="40000"/>
           </a:blip>
           <a:stretch xmlns:a="http://schemas.openxmlformats.org/drawingml/2006/main">
@@ -1562,7 +1775,7 @@
           <p:cNvPr id="2" name="Title 1">
             <a:extLst xmlns:a="http://schemas.openxmlformats.org/drawingml/2006/main">
               <a:ext uri="{FF2B5EF4-FFF2-40B4-BE49-F238E27FC236}">
-                <a16:creationId xmlns:a16="http://schemas.microsoft.com/office/drawing/2014/main" id="{9739966A-2531-41A9-8E9E-CEFDC26134B0}"/>
+                <a16:creationId xmlns:a16="http://schemas.microsoft.com/office/drawing/2014/main" id="{43CF6ADC-045A-4BB8-B74C-07219DF6E769}"/>
               </a:ext>
             </a:extLst>
           </p:cNvPr>
@@ -1609,7 +1822,7 @@
           <p:cNvPr id="3" name="Subtitle 2">
             <a:extLst xmlns:a="http://schemas.openxmlformats.org/drawingml/2006/main">
               <a:ext uri="{FF2B5EF4-FFF2-40B4-BE49-F238E27FC236}">
-                <a16:creationId xmlns:a16="http://schemas.microsoft.com/office/drawing/2014/main" id="{D0F3D18D-EDDF-43BA-9129-E6B787A070DF}"/>
+                <a16:creationId xmlns:a16="http://schemas.microsoft.com/office/drawing/2014/main" id="{54C65AFE-4D12-45B0-BB41-B00F4AEDD268}"/>
               </a:ext>
             </a:extLst>
           </p:cNvPr>
@@ -1737,7 +1950,7 @@
           <p:cNvPr id="4" name="Date Placeholder 3">
             <a:extLst xmlns:a="http://schemas.openxmlformats.org/drawingml/2006/main">
               <a:ext uri="{FF2B5EF4-FFF2-40B4-BE49-F238E27FC236}">
-                <a16:creationId xmlns:a16="http://schemas.microsoft.com/office/drawing/2014/main" id="{CF052D0A-83E2-4C67-969E-B1379A1CBEAB}"/>
+                <a16:creationId xmlns:a16="http://schemas.microsoft.com/office/drawing/2014/main" id="{C31C6937-8A6E-4456-9BED-3375C775022F}"/>
               </a:ext>
             </a:extLst>
           </p:cNvPr>
@@ -1765,7 +1978,7 @@
           <p:cNvPr id="5" name="Footer Placeholder 4">
             <a:extLst xmlns:a="http://schemas.openxmlformats.org/drawingml/2006/main">
               <a:ext uri="{FF2B5EF4-FFF2-40B4-BE49-F238E27FC236}">
-                <a16:creationId xmlns:a16="http://schemas.microsoft.com/office/drawing/2014/main" id="{38AFE541-0571-4233-9B35-EC89CCC9EF5A}"/>
+                <a16:creationId xmlns:a16="http://schemas.microsoft.com/office/drawing/2014/main" id="{3BCDB690-A91D-44BC-BC05-BDB7DFE508BB}"/>
               </a:ext>
             </a:extLst>
           </p:cNvPr>
@@ -1790,7 +2003,7 @@
           <p:cNvPr id="6" name="Slide Number Placeholder 5">
             <a:extLst xmlns:a="http://schemas.openxmlformats.org/drawingml/2006/main">
               <a:ext uri="{FF2B5EF4-FFF2-40B4-BE49-F238E27FC236}">
-                <a16:creationId xmlns:a16="http://schemas.microsoft.com/office/drawing/2014/main" id="{452DE4DD-C5AB-4BA2-9418-211FF677C632}"/>
+                <a16:creationId xmlns:a16="http://schemas.microsoft.com/office/drawing/2014/main" id="{27F51FF9-1767-4321-A2AA-9E33DF5E6341}"/>
               </a:ext>
             </a:extLst>
           </p:cNvPr>
@@ -1889,7 +2102,7 @@
           <p:cNvPr id="2" name="Title 1">
             <a:extLst xmlns:a="http://schemas.openxmlformats.org/drawingml/2006/main">
               <a:ext uri="{FF2B5EF4-FFF2-40B4-BE49-F238E27FC236}">
-                <a16:creationId xmlns:a16="http://schemas.microsoft.com/office/drawing/2014/main" id="{3ECA5D39-C840-49A7-B0E3-8204BF256E11}"/>
+                <a16:creationId xmlns:a16="http://schemas.microsoft.com/office/drawing/2014/main" id="{8F22744B-0190-433D-A1A7-903762449583}"/>
               </a:ext>
             </a:extLst>
           </p:cNvPr>
@@ -1916,7 +2129,7 @@
           <p:cNvPr id="3" name="Vertical Text Placeholder 2">
             <a:extLst xmlns:a="http://schemas.openxmlformats.org/drawingml/2006/main">
               <a:ext uri="{FF2B5EF4-FFF2-40B4-BE49-F238E27FC236}">
-                <a16:creationId xmlns:a16="http://schemas.microsoft.com/office/drawing/2014/main" id="{7C1E71D0-56B8-4208-B5D6-AF1F64C2D094}"/>
+                <a16:creationId xmlns:a16="http://schemas.microsoft.com/office/drawing/2014/main" id="{63024063-7304-44D6-A367-385D3FE832B6}"/>
               </a:ext>
             </a:extLst>
           </p:cNvPr>
@@ -1978,7 +2191,7 @@
           <p:cNvPr id="4" name="Date Placeholder 3">
             <a:extLst xmlns:a="http://schemas.openxmlformats.org/drawingml/2006/main">
               <a:ext uri="{FF2B5EF4-FFF2-40B4-BE49-F238E27FC236}">
-                <a16:creationId xmlns:a16="http://schemas.microsoft.com/office/drawing/2014/main" id="{59B75D28-87F1-4879-8ADD-853CC67CEDDF}"/>
+                <a16:creationId xmlns:a16="http://schemas.microsoft.com/office/drawing/2014/main" id="{3A5BA36D-FB9A-454E-BFC4-8CD65BD75027}"/>
               </a:ext>
             </a:extLst>
           </p:cNvPr>
@@ -2006,7 +2219,7 @@
           <p:cNvPr id="5" name="Footer Placeholder 4">
             <a:extLst xmlns:a="http://schemas.openxmlformats.org/drawingml/2006/main">
               <a:ext uri="{FF2B5EF4-FFF2-40B4-BE49-F238E27FC236}">
-                <a16:creationId xmlns:a16="http://schemas.microsoft.com/office/drawing/2014/main" id="{F76F415E-C19D-4E57-B30C-913B631DFF5E}"/>
+                <a16:creationId xmlns:a16="http://schemas.microsoft.com/office/drawing/2014/main" id="{E64B97CA-560E-4570-80A2-028D6DE63923}"/>
               </a:ext>
             </a:extLst>
           </p:cNvPr>
@@ -2031,7 +2244,7 @@
           <p:cNvPr id="6" name="Slide Number Placeholder 5">
             <a:extLst xmlns:a="http://schemas.openxmlformats.org/drawingml/2006/main">
               <a:ext uri="{FF2B5EF4-FFF2-40B4-BE49-F238E27FC236}">
-                <a16:creationId xmlns:a16="http://schemas.microsoft.com/office/drawing/2014/main" id="{9EC1F2AC-B2C8-47D4-B4A4-78FFAC1219EE}"/>
+                <a16:creationId xmlns:a16="http://schemas.microsoft.com/office/drawing/2014/main" id="{F14D8318-DA84-49C8-B1C5-8C7A42EF9B44}"/>
               </a:ext>
             </a:extLst>
           </p:cNvPr>
@@ -2076,7 +2289,7 @@
           <p:cNvPr id="2" name="Vertical Title 1">
             <a:extLst xmlns:a="http://schemas.openxmlformats.org/drawingml/2006/main">
               <a:ext uri="{FF2B5EF4-FFF2-40B4-BE49-F238E27FC236}">
-                <a16:creationId xmlns:a16="http://schemas.microsoft.com/office/drawing/2014/main" id="{2A7C7562-2875-4212-8D0C-D60A1F56A516}"/>
+                <a16:creationId xmlns:a16="http://schemas.microsoft.com/office/drawing/2014/main" id="{470A5E60-ED78-4E32-8460-E7EDADA1854B}"/>
               </a:ext>
             </a:extLst>
           </p:cNvPr>
@@ -2108,7 +2321,7 @@
           <p:cNvPr id="3" name="Vertical Text Placeholder 2">
             <a:extLst xmlns:a="http://schemas.openxmlformats.org/drawingml/2006/main">
               <a:ext uri="{FF2B5EF4-FFF2-40B4-BE49-F238E27FC236}">
-                <a16:creationId xmlns:a16="http://schemas.microsoft.com/office/drawing/2014/main" id="{84985AEA-DC84-4A65-9C15-523EB451D72B}"/>
+                <a16:creationId xmlns:a16="http://schemas.microsoft.com/office/drawing/2014/main" id="{7263F2EF-A24E-4938-8A03-B3AA0A4BE950}"/>
               </a:ext>
             </a:extLst>
           </p:cNvPr>
@@ -2175,7 +2388,7 @@
           <p:cNvPr id="4" name="Date Placeholder 3">
             <a:extLst xmlns:a="http://schemas.openxmlformats.org/drawingml/2006/main">
               <a:ext uri="{FF2B5EF4-FFF2-40B4-BE49-F238E27FC236}">
-                <a16:creationId xmlns:a16="http://schemas.microsoft.com/office/drawing/2014/main" id="{865E6857-E244-485A-AD7B-27D40DAE59BB}"/>
+                <a16:creationId xmlns:a16="http://schemas.microsoft.com/office/drawing/2014/main" id="{FF2F3BBE-D115-42B0-A083-954F52283A14}"/>
               </a:ext>
             </a:extLst>
           </p:cNvPr>
@@ -2203,7 +2416,7 @@
           <p:cNvPr id="5" name="Footer Placeholder 4">
             <a:extLst xmlns:a="http://schemas.openxmlformats.org/drawingml/2006/main">
               <a:ext uri="{FF2B5EF4-FFF2-40B4-BE49-F238E27FC236}">
-                <a16:creationId xmlns:a16="http://schemas.microsoft.com/office/drawing/2014/main" id="{7E79D901-DE97-4C7C-9DDA-6A51112C98F1}"/>
+                <a16:creationId xmlns:a16="http://schemas.microsoft.com/office/drawing/2014/main" id="{F1DC7121-688D-42C5-A1A8-98FB2854FCF0}"/>
               </a:ext>
             </a:extLst>
           </p:cNvPr>
@@ -2228,7 +2441,7 @@
           <p:cNvPr id="6" name="Slide Number Placeholder 5">
             <a:extLst xmlns:a="http://schemas.openxmlformats.org/drawingml/2006/main">
               <a:ext uri="{FF2B5EF4-FFF2-40B4-BE49-F238E27FC236}">
-                <a16:creationId xmlns:a16="http://schemas.microsoft.com/office/drawing/2014/main" id="{CF48EDFE-C371-4BEE-9898-39EBF02ABED2}"/>
+                <a16:creationId xmlns:a16="http://schemas.microsoft.com/office/drawing/2014/main" id="{6481997E-0372-4088-A23C-8169F18B5282}"/>
               </a:ext>
             </a:extLst>
           </p:cNvPr>
@@ -2273,7 +2486,7 @@
           <p:cNvPr id="3" name="Content Placeholder 2">
             <a:extLst xmlns:a="http://schemas.openxmlformats.org/drawingml/2006/main">
               <a:ext uri="{FF2B5EF4-FFF2-40B4-BE49-F238E27FC236}">
-                <a16:creationId xmlns:a16="http://schemas.microsoft.com/office/drawing/2014/main" id="{4F396B6D-21D9-4E32-A708-C8FF475CEC5D}"/>
+                <a16:creationId xmlns:a16="http://schemas.microsoft.com/office/drawing/2014/main" id="{EA46B63F-0CA0-40F8-8239-1DDAFF83B809}"/>
               </a:ext>
             </a:extLst>
           </p:cNvPr>
@@ -2336,7 +2549,7 @@
           <p:cNvPr id="4" name="Date Placeholder 3">
             <a:extLst xmlns:a="http://schemas.openxmlformats.org/drawingml/2006/main">
               <a:ext uri="{FF2B5EF4-FFF2-40B4-BE49-F238E27FC236}">
-                <a16:creationId xmlns:a16="http://schemas.microsoft.com/office/drawing/2014/main" id="{76144B1D-A036-4094-AFD5-A07EC1AD97C1}"/>
+                <a16:creationId xmlns:a16="http://schemas.microsoft.com/office/drawing/2014/main" id="{DC2BC28C-D157-41AE-8A3A-BA32ACC1AC37}"/>
               </a:ext>
             </a:extLst>
           </p:cNvPr>
@@ -2364,7 +2577,7 @@
           <p:cNvPr id="5" name="Footer Placeholder 4">
             <a:extLst xmlns:a="http://schemas.openxmlformats.org/drawingml/2006/main">
               <a:ext uri="{FF2B5EF4-FFF2-40B4-BE49-F238E27FC236}">
-                <a16:creationId xmlns:a16="http://schemas.microsoft.com/office/drawing/2014/main" id="{5444B560-B3CE-47F8-B2CC-450C1E30649A}"/>
+                <a16:creationId xmlns:a16="http://schemas.microsoft.com/office/drawing/2014/main" id="{6FB10B4D-A96E-4788-B71C-84943EDFCD22}"/>
               </a:ext>
             </a:extLst>
           </p:cNvPr>
@@ -2389,7 +2602,7 @@
           <p:cNvPr id="6" name="Slide Number Placeholder 5">
             <a:extLst xmlns:a="http://schemas.openxmlformats.org/drawingml/2006/main">
               <a:ext uri="{FF2B5EF4-FFF2-40B4-BE49-F238E27FC236}">
-                <a16:creationId xmlns:a16="http://schemas.microsoft.com/office/drawing/2014/main" id="{E7F9DBC8-1616-42FF-B4D5-6635E6875D45}"/>
+                <a16:creationId xmlns:a16="http://schemas.microsoft.com/office/drawing/2014/main" id="{EEE0B505-AE81-41AC-BB9B-C606220E409F}"/>
               </a:ext>
             </a:extLst>
           </p:cNvPr>
@@ -2477,7 +2690,7 @@
           <p:cNvPr id="2" name="Title 1">
             <a:extLst xmlns:a="http://schemas.openxmlformats.org/drawingml/2006/main">
               <a:ext uri="{FF2B5EF4-FFF2-40B4-BE49-F238E27FC236}">
-                <a16:creationId xmlns:a16="http://schemas.microsoft.com/office/drawing/2014/main" id="{D63F93F9-6895-403C-9AB2-3D3A80E14745}"/>
+                <a16:creationId xmlns:a16="http://schemas.microsoft.com/office/drawing/2014/main" id="{7270F2F9-0DB1-4789-8A87-6AC3D29C262A}"/>
               </a:ext>
             </a:extLst>
           </p:cNvPr>
@@ -2515,7 +2728,7 @@
           <p:cNvPr id="3" name="Text Placeholder 2">
             <a:extLst xmlns:a="http://schemas.openxmlformats.org/drawingml/2006/main">
               <a:ext uri="{FF2B5EF4-FFF2-40B4-BE49-F238E27FC236}">
-                <a16:creationId xmlns:a16="http://schemas.microsoft.com/office/drawing/2014/main" id="{4D88B928-705C-4DA5-88CF-2E323C14E16A}"/>
+                <a16:creationId xmlns:a16="http://schemas.microsoft.com/office/drawing/2014/main" id="{A1C23F6E-8CD7-4157-AA97-7EBF0D375686}"/>
               </a:ext>
             </a:extLst>
           </p:cNvPr>
@@ -2641,7 +2854,7 @@
           <p:cNvPr id="4" name="Date Placeholder 3">
             <a:extLst xmlns:a="http://schemas.openxmlformats.org/drawingml/2006/main">
               <a:ext uri="{FF2B5EF4-FFF2-40B4-BE49-F238E27FC236}">
-                <a16:creationId xmlns:a16="http://schemas.microsoft.com/office/drawing/2014/main" id="{90087CA1-2BE2-44F1-ADE0-EA4CFFF6F301}"/>
+                <a16:creationId xmlns:a16="http://schemas.microsoft.com/office/drawing/2014/main" id="{D22FB6BC-A1BA-4B88-AA05-41BDAE985303}"/>
               </a:ext>
             </a:extLst>
           </p:cNvPr>
@@ -2669,7 +2882,7 @@
           <p:cNvPr id="5" name="Footer Placeholder 4">
             <a:extLst xmlns:a="http://schemas.openxmlformats.org/drawingml/2006/main">
               <a:ext uri="{FF2B5EF4-FFF2-40B4-BE49-F238E27FC236}">
-                <a16:creationId xmlns:a16="http://schemas.microsoft.com/office/drawing/2014/main" id="{4C52BB6B-1743-4ADD-A43F-CC01DF1FF3D2}"/>
+                <a16:creationId xmlns:a16="http://schemas.microsoft.com/office/drawing/2014/main" id="{09D95812-4260-4729-A1EB-BD81BB9B20C6}"/>
               </a:ext>
             </a:extLst>
           </p:cNvPr>
@@ -2694,7 +2907,7 @@
           <p:cNvPr id="6" name="Slide Number Placeholder 5">
             <a:extLst xmlns:a="http://schemas.openxmlformats.org/drawingml/2006/main">
               <a:ext uri="{FF2B5EF4-FFF2-40B4-BE49-F238E27FC236}">
-                <a16:creationId xmlns:a16="http://schemas.microsoft.com/office/drawing/2014/main" id="{FCF6CE1A-9F12-447F-917E-75844BFEF12C}"/>
+                <a16:creationId xmlns:a16="http://schemas.microsoft.com/office/drawing/2014/main" id="{38B7689B-1AB5-40DC-8422-941CE0539B0C}"/>
               </a:ext>
             </a:extLst>
           </p:cNvPr>
@@ -2739,7 +2952,7 @@
           <p:cNvPr id="2" name="Title 1">
             <a:extLst xmlns:a="http://schemas.openxmlformats.org/drawingml/2006/main">
               <a:ext uri="{FF2B5EF4-FFF2-40B4-BE49-F238E27FC236}">
-                <a16:creationId xmlns:a16="http://schemas.microsoft.com/office/drawing/2014/main" id="{BB24B45E-67E8-42F5-8B55-E1E63DFAF7D4}"/>
+                <a16:creationId xmlns:a16="http://schemas.microsoft.com/office/drawing/2014/main" id="{7BB06286-0B3B-4A6D-8DC9-5A8D4D82D1B0}"/>
               </a:ext>
             </a:extLst>
           </p:cNvPr>
@@ -2766,7 +2979,7 @@
           <p:cNvPr id="3" name="Content Placeholder 2">
             <a:extLst xmlns:a="http://schemas.openxmlformats.org/drawingml/2006/main">
               <a:ext uri="{FF2B5EF4-FFF2-40B4-BE49-F238E27FC236}">
-                <a16:creationId xmlns:a16="http://schemas.microsoft.com/office/drawing/2014/main" id="{C1ECBE52-5B62-4061-A934-6C816C86B5A8}"/>
+                <a16:creationId xmlns:a16="http://schemas.microsoft.com/office/drawing/2014/main" id="{5948A8CB-DA93-4B82-93A8-8404AE11A7F6}"/>
               </a:ext>
             </a:extLst>
           </p:cNvPr>
@@ -2871,7 +3084,7 @@
           <p:cNvPr id="4" name="Content Placeholder 3">
             <a:extLst xmlns:a="http://schemas.openxmlformats.org/drawingml/2006/main">
               <a:ext uri="{FF2B5EF4-FFF2-40B4-BE49-F238E27FC236}">
-                <a16:creationId xmlns:a16="http://schemas.microsoft.com/office/drawing/2014/main" id="{3DA14F3F-2123-4E89-A0B7-546CD4E5D352}"/>
+                <a16:creationId xmlns:a16="http://schemas.microsoft.com/office/drawing/2014/main" id="{093AF287-0C1D-4CF1-8703-22183BB2961F}"/>
               </a:ext>
             </a:extLst>
           </p:cNvPr>
@@ -2976,7 +3189,7 @@
           <p:cNvPr id="5" name="Date Placeholder 4">
             <a:extLst xmlns:a="http://schemas.openxmlformats.org/drawingml/2006/main">
               <a:ext uri="{FF2B5EF4-FFF2-40B4-BE49-F238E27FC236}">
-                <a16:creationId xmlns:a16="http://schemas.microsoft.com/office/drawing/2014/main" id="{C28BD3A0-96F7-4E95-8242-291883FAA053}"/>
+                <a16:creationId xmlns:a16="http://schemas.microsoft.com/office/drawing/2014/main" id="{D78D1BA0-912F-4FBA-ADA3-D5260EC94308}"/>
               </a:ext>
             </a:extLst>
           </p:cNvPr>
@@ -3004,7 +3217,7 @@
           <p:cNvPr id="6" name="Footer Placeholder 5">
             <a:extLst xmlns:a="http://schemas.openxmlformats.org/drawingml/2006/main">
               <a:ext uri="{FF2B5EF4-FFF2-40B4-BE49-F238E27FC236}">
-                <a16:creationId xmlns:a16="http://schemas.microsoft.com/office/drawing/2014/main" id="{62887400-CC2D-4C30-94D2-91B290535F21}"/>
+                <a16:creationId xmlns:a16="http://schemas.microsoft.com/office/drawing/2014/main" id="{5B48A3C4-6797-45C6-8132-D3127DACA575}"/>
               </a:ext>
             </a:extLst>
           </p:cNvPr>
@@ -3029,7 +3242,7 @@
           <p:cNvPr id="7" name="Slide Number Placeholder 6">
             <a:extLst xmlns:a="http://schemas.openxmlformats.org/drawingml/2006/main">
               <a:ext uri="{FF2B5EF4-FFF2-40B4-BE49-F238E27FC236}">
-                <a16:creationId xmlns:a16="http://schemas.microsoft.com/office/drawing/2014/main" id="{DF2CCD98-4ED8-426C-8453-5C76D712183F}"/>
+                <a16:creationId xmlns:a16="http://schemas.microsoft.com/office/drawing/2014/main" id="{3CF1B1B4-9727-4795-AA53-C3103144B218}"/>
               </a:ext>
             </a:extLst>
           </p:cNvPr>
@@ -3074,7 +3287,7 @@
           <p:cNvPr id="2" name="Title 1">
             <a:extLst xmlns:a="http://schemas.openxmlformats.org/drawingml/2006/main">
               <a:ext uri="{FF2B5EF4-FFF2-40B4-BE49-F238E27FC236}">
-                <a16:creationId xmlns:a16="http://schemas.microsoft.com/office/drawing/2014/main" id="{568B3A9A-990A-440C-A360-E54C038E43E9}"/>
+                <a16:creationId xmlns:a16="http://schemas.microsoft.com/office/drawing/2014/main" id="{919064CE-290B-4D51-85D7-42F5BF98D20E}"/>
               </a:ext>
             </a:extLst>
           </p:cNvPr>
@@ -3106,7 +3319,7 @@
           <p:cNvPr id="3" name="Text Placeholder 2">
             <a:extLst xmlns:a="http://schemas.openxmlformats.org/drawingml/2006/main">
               <a:ext uri="{FF2B5EF4-FFF2-40B4-BE49-F238E27FC236}">
-                <a16:creationId xmlns:a16="http://schemas.microsoft.com/office/drawing/2014/main" id="{79CA6EAB-8E84-4D14-99E5-2C96097BAD04}"/>
+                <a16:creationId xmlns:a16="http://schemas.microsoft.com/office/drawing/2014/main" id="{A39E07C8-9852-4BFE-A58F-AF583491CD32}"/>
               </a:ext>
             </a:extLst>
           </p:cNvPr>
@@ -3178,7 +3391,7 @@
           <p:cNvPr id="4" name="Content Placeholder 3">
             <a:extLst xmlns:a="http://schemas.openxmlformats.org/drawingml/2006/main">
               <a:ext uri="{FF2B5EF4-FFF2-40B4-BE49-F238E27FC236}">
-                <a16:creationId xmlns:a16="http://schemas.microsoft.com/office/drawing/2014/main" id="{E7CD1BF2-7BBE-492E-8FCB-E4388C66CF37}"/>
+                <a16:creationId xmlns:a16="http://schemas.microsoft.com/office/drawing/2014/main" id="{9657F5E3-58F2-47D5-878E-8E39FF5C7EB9}"/>
               </a:ext>
             </a:extLst>
           </p:cNvPr>
@@ -3282,7 +3495,7 @@
           <p:cNvPr id="5" name="Text Placeholder 4">
             <a:extLst xmlns:a="http://schemas.openxmlformats.org/drawingml/2006/main">
               <a:ext uri="{FF2B5EF4-FFF2-40B4-BE49-F238E27FC236}">
-                <a16:creationId xmlns:a16="http://schemas.microsoft.com/office/drawing/2014/main" id="{57F365EC-010B-4101-B787-96422CDE5904}"/>
+                <a16:creationId xmlns:a16="http://schemas.microsoft.com/office/drawing/2014/main" id="{85E3A5E4-A942-44E1-BB71-C8D3C758BAA7}"/>
               </a:ext>
             </a:extLst>
           </p:cNvPr>
@@ -3354,7 +3567,7 @@
           <p:cNvPr id="6" name="Content Placeholder 5">
             <a:extLst xmlns:a="http://schemas.openxmlformats.org/drawingml/2006/main">
               <a:ext uri="{FF2B5EF4-FFF2-40B4-BE49-F238E27FC236}">
-                <a16:creationId xmlns:a16="http://schemas.microsoft.com/office/drawing/2014/main" id="{2ABFB6EE-D09E-4CB9-8811-5AD0907B8FF6}"/>
+                <a16:creationId xmlns:a16="http://schemas.microsoft.com/office/drawing/2014/main" id="{27D9D2A8-8331-4A2D-B148-2D6660964B17}"/>
               </a:ext>
             </a:extLst>
           </p:cNvPr>
@@ -3458,7 +3671,7 @@
           <p:cNvPr id="7" name="Date Placeholder 6">
             <a:extLst xmlns:a="http://schemas.openxmlformats.org/drawingml/2006/main">
               <a:ext uri="{FF2B5EF4-FFF2-40B4-BE49-F238E27FC236}">
-                <a16:creationId xmlns:a16="http://schemas.microsoft.com/office/drawing/2014/main" id="{606333A5-3B81-4708-999B-682C5ED4E55C}"/>
+                <a16:creationId xmlns:a16="http://schemas.microsoft.com/office/drawing/2014/main" id="{A6C32A0E-66C4-4E89-BEEB-1529728ECFEB}"/>
               </a:ext>
             </a:extLst>
           </p:cNvPr>
@@ -3486,7 +3699,7 @@
           <p:cNvPr id="8" name="Footer Placeholder 7">
             <a:extLst xmlns:a="http://schemas.openxmlformats.org/drawingml/2006/main">
               <a:ext uri="{FF2B5EF4-FFF2-40B4-BE49-F238E27FC236}">
-                <a16:creationId xmlns:a16="http://schemas.microsoft.com/office/drawing/2014/main" id="{7A5D82CB-FB9E-4B34-9985-5662B23FA4B7}"/>
+                <a16:creationId xmlns:a16="http://schemas.microsoft.com/office/drawing/2014/main" id="{C71744D2-1EC8-42E6-8672-48686F35496B}"/>
               </a:ext>
             </a:extLst>
           </p:cNvPr>
@@ -3511,7 +3724,7 @@
           <p:cNvPr id="9" name="Slide Number Placeholder 8">
             <a:extLst xmlns:a="http://schemas.openxmlformats.org/drawingml/2006/main">
               <a:ext uri="{FF2B5EF4-FFF2-40B4-BE49-F238E27FC236}">
-                <a16:creationId xmlns:a16="http://schemas.microsoft.com/office/drawing/2014/main" id="{6D94D0C1-E7C1-436C-AD37-22FBBBD6E268}"/>
+                <a16:creationId xmlns:a16="http://schemas.microsoft.com/office/drawing/2014/main" id="{EB54D8B3-9F23-4433-9E33-614339210992}"/>
               </a:ext>
             </a:extLst>
           </p:cNvPr>
@@ -3556,7 +3769,7 @@
           <p:cNvPr id="2" name="Title 1">
             <a:extLst xmlns:a="http://schemas.openxmlformats.org/drawingml/2006/main">
               <a:ext uri="{FF2B5EF4-FFF2-40B4-BE49-F238E27FC236}">
-                <a16:creationId xmlns:a16="http://schemas.microsoft.com/office/drawing/2014/main" id="{AF5883E7-27DD-48C3-B0F8-611B928F3786}"/>
+                <a16:creationId xmlns:a16="http://schemas.microsoft.com/office/drawing/2014/main" id="{A1F193CF-5171-41C8-9233-8B649A842813}"/>
               </a:ext>
             </a:extLst>
           </p:cNvPr>
@@ -3583,7 +3796,7 @@
           <p:cNvPr id="3" name="Date Placeholder 2">
             <a:extLst xmlns:a="http://schemas.openxmlformats.org/drawingml/2006/main">
               <a:ext uri="{FF2B5EF4-FFF2-40B4-BE49-F238E27FC236}">
-                <a16:creationId xmlns:a16="http://schemas.microsoft.com/office/drawing/2014/main" id="{50F617F1-7438-44F9-B107-79B2E45569F8}"/>
+                <a16:creationId xmlns:a16="http://schemas.microsoft.com/office/drawing/2014/main" id="{6F788745-E022-4FB9-93D9-4A1B925223F6}"/>
               </a:ext>
             </a:extLst>
           </p:cNvPr>
@@ -3611,7 +3824,7 @@
           <p:cNvPr id="4" name="Footer Placeholder 3">
             <a:extLst xmlns:a="http://schemas.openxmlformats.org/drawingml/2006/main">
               <a:ext uri="{FF2B5EF4-FFF2-40B4-BE49-F238E27FC236}">
-                <a16:creationId xmlns:a16="http://schemas.microsoft.com/office/drawing/2014/main" id="{A4C4B8B1-F083-4CF7-8A90-0917D1A59EC5}"/>
+                <a16:creationId xmlns:a16="http://schemas.microsoft.com/office/drawing/2014/main" id="{9DDC5C9B-D239-4066-BC5F-B384AB3DA43B}"/>
               </a:ext>
             </a:extLst>
           </p:cNvPr>
@@ -3636,7 +3849,7 @@
           <p:cNvPr id="5" name="Slide Number Placeholder 4">
             <a:extLst xmlns:a="http://schemas.openxmlformats.org/drawingml/2006/main">
               <a:ext uri="{FF2B5EF4-FFF2-40B4-BE49-F238E27FC236}">
-                <a16:creationId xmlns:a16="http://schemas.microsoft.com/office/drawing/2014/main" id="{C4609E04-5E7C-48F7-AE42-AE6EA23AB3D3}"/>
+                <a16:creationId xmlns:a16="http://schemas.microsoft.com/office/drawing/2014/main" id="{0F220C7D-7187-446D-A058-59292F25EBAA}"/>
               </a:ext>
             </a:extLst>
           </p:cNvPr>
@@ -3681,7 +3894,7 @@
           <p:cNvPr id="2" name="Date Placeholder 1">
             <a:extLst xmlns:a="http://schemas.openxmlformats.org/drawingml/2006/main">
               <a:ext uri="{FF2B5EF4-FFF2-40B4-BE49-F238E27FC236}">
-                <a16:creationId xmlns:a16="http://schemas.microsoft.com/office/drawing/2014/main" id="{73E41341-A524-415D-8E79-A8987CFFABB5}"/>
+                <a16:creationId xmlns:a16="http://schemas.microsoft.com/office/drawing/2014/main" id="{E69188C2-6DF0-41BA-8122-2B43449911A9}"/>
               </a:ext>
             </a:extLst>
           </p:cNvPr>
@@ -3709,7 +3922,7 @@
           <p:cNvPr id="3" name="Footer Placeholder 2">
             <a:extLst xmlns:a="http://schemas.openxmlformats.org/drawingml/2006/main">
               <a:ext uri="{FF2B5EF4-FFF2-40B4-BE49-F238E27FC236}">
-                <a16:creationId xmlns:a16="http://schemas.microsoft.com/office/drawing/2014/main" id="{F7FBD957-3686-4CEB-BE91-8598BB516692}"/>
+                <a16:creationId xmlns:a16="http://schemas.microsoft.com/office/drawing/2014/main" id="{23BA7000-09C8-4D4D-B526-A44FC789BCDE}"/>
               </a:ext>
             </a:extLst>
           </p:cNvPr>
@@ -3734,7 +3947,7 @@
           <p:cNvPr id="4" name="Slide Number Placeholder 3">
             <a:extLst xmlns:a="http://schemas.openxmlformats.org/drawingml/2006/main">
               <a:ext uri="{FF2B5EF4-FFF2-40B4-BE49-F238E27FC236}">
-                <a16:creationId xmlns:a16="http://schemas.microsoft.com/office/drawing/2014/main" id="{4D1174EA-6BFF-4313-B9F9-92550743A1BF}"/>
+                <a16:creationId xmlns:a16="http://schemas.microsoft.com/office/drawing/2014/main" id="{987BF3BE-EA4B-43C2-BF51-34F0D285B670}"/>
               </a:ext>
             </a:extLst>
           </p:cNvPr>
@@ -3779,7 +3992,7 @@
           <p:cNvPr id="2" name="Title 1">
             <a:extLst xmlns:a="http://schemas.openxmlformats.org/drawingml/2006/main">
               <a:ext uri="{FF2B5EF4-FFF2-40B4-BE49-F238E27FC236}">
-                <a16:creationId xmlns:a16="http://schemas.microsoft.com/office/drawing/2014/main" id="{05F3C48E-B7C2-4BCA-A009-FD67983DAF2C}"/>
+                <a16:creationId xmlns:a16="http://schemas.microsoft.com/office/drawing/2014/main" id="{D61239F8-3A11-407B-8AB5-8164A5D3AC26}"/>
               </a:ext>
             </a:extLst>
           </p:cNvPr>
@@ -3816,7 +4029,7 @@
           <p:cNvPr id="3" name="Content Placeholder 2">
             <a:extLst xmlns:a="http://schemas.openxmlformats.org/drawingml/2006/main">
               <a:ext uri="{FF2B5EF4-FFF2-40B4-BE49-F238E27FC236}">
-                <a16:creationId xmlns:a16="http://schemas.microsoft.com/office/drawing/2014/main" id="{49DC3854-A159-4889-9D8C-6114EFA1EEAD}"/>
+                <a16:creationId xmlns:a16="http://schemas.microsoft.com/office/drawing/2014/main" id="{D11A68A0-36D1-46A7-A574-C11D1B52B5A9}"/>
               </a:ext>
             </a:extLst>
           </p:cNvPr>
@@ -3920,7 +4133,7 @@
           <p:cNvPr id="4" name="Text Placeholder 3">
             <a:extLst xmlns:a="http://schemas.openxmlformats.org/drawingml/2006/main">
               <a:ext uri="{FF2B5EF4-FFF2-40B4-BE49-F238E27FC236}">
-                <a16:creationId xmlns:a16="http://schemas.microsoft.com/office/drawing/2014/main" id="{0C3C284E-B7CD-4E58-89CC-41AC8F4C7468}"/>
+                <a16:creationId xmlns:a16="http://schemas.microsoft.com/office/drawing/2014/main" id="{6B8BE67E-210C-4B22-8B33-A6B1082DAD2A}"/>
               </a:ext>
             </a:extLst>
           </p:cNvPr>
@@ -3992,7 +4205,7 @@
           <p:cNvPr id="5" name="Date Placeholder 4">
             <a:extLst xmlns:a="http://schemas.openxmlformats.org/drawingml/2006/main">
               <a:ext uri="{FF2B5EF4-FFF2-40B4-BE49-F238E27FC236}">
-                <a16:creationId xmlns:a16="http://schemas.microsoft.com/office/drawing/2014/main" id="{1F52702F-C1FC-4BEB-95CB-2682BD4EE816}"/>
+                <a16:creationId xmlns:a16="http://schemas.microsoft.com/office/drawing/2014/main" id="{76F61573-B34A-4A6B-BE79-85B9E182CDAE}"/>
               </a:ext>
             </a:extLst>
           </p:cNvPr>
@@ -4020,7 +4233,7 @@
           <p:cNvPr id="6" name="Footer Placeholder 5">
             <a:extLst xmlns:a="http://schemas.openxmlformats.org/drawingml/2006/main">
               <a:ext uri="{FF2B5EF4-FFF2-40B4-BE49-F238E27FC236}">
-                <a16:creationId xmlns:a16="http://schemas.microsoft.com/office/drawing/2014/main" id="{138141E2-0C81-4362-A84B-C7FCEE7FA15A}"/>
+                <a16:creationId xmlns:a16="http://schemas.microsoft.com/office/drawing/2014/main" id="{C4BD164D-AC03-4E9A-B07B-37A1FB3F4072}"/>
               </a:ext>
             </a:extLst>
           </p:cNvPr>
@@ -4045,7 +4258,7 @@
           <p:cNvPr id="7" name="Slide Number Placeholder 6">
             <a:extLst xmlns:a="http://schemas.openxmlformats.org/drawingml/2006/main">
               <a:ext uri="{FF2B5EF4-FFF2-40B4-BE49-F238E27FC236}">
-                <a16:creationId xmlns:a16="http://schemas.microsoft.com/office/drawing/2014/main" id="{42D945BF-4E2E-456D-81A6-C46134D49E57}"/>
+                <a16:creationId xmlns:a16="http://schemas.microsoft.com/office/drawing/2014/main" id="{221C329E-56D5-4296-9432-7E6673B6F635}"/>
               </a:ext>
             </a:extLst>
           </p:cNvPr>
@@ -4090,7 +4303,7 @@
           <p:cNvPr id="2" name="Title 1">
             <a:extLst xmlns:a="http://schemas.openxmlformats.org/drawingml/2006/main">
               <a:ext uri="{FF2B5EF4-FFF2-40B4-BE49-F238E27FC236}">
-                <a16:creationId xmlns:a16="http://schemas.microsoft.com/office/drawing/2014/main" id="{DDA31D7B-6A44-4A4F-9883-8758713242B3}"/>
+                <a16:creationId xmlns:a16="http://schemas.microsoft.com/office/drawing/2014/main" id="{ABEE7530-2CAD-4BBB-B84D-76ADF682823A}"/>
               </a:ext>
             </a:extLst>
           </p:cNvPr>
@@ -4127,7 +4340,7 @@
           <p:cNvPr id="3" name="Picture Placeholder 2">
             <a:extLst xmlns:a="http://schemas.openxmlformats.org/drawingml/2006/main">
               <a:ext uri="{FF2B5EF4-FFF2-40B4-BE49-F238E27FC236}">
-                <a16:creationId xmlns:a16="http://schemas.microsoft.com/office/drawing/2014/main" id="{5782A427-8AD1-4BF9-A3CA-813F74509C2F}"/>
+                <a16:creationId xmlns:a16="http://schemas.microsoft.com/office/drawing/2014/main" id="{64C5F6CE-64E4-45AE-A197-0395B6ACB44F}"/>
               </a:ext>
             </a:extLst>
           </p:cNvPr>
@@ -4196,7 +4409,7 @@
           <p:cNvPr id="4" name="Text Placeholder 3">
             <a:extLst xmlns:a="http://schemas.openxmlformats.org/drawingml/2006/main">
               <a:ext uri="{FF2B5EF4-FFF2-40B4-BE49-F238E27FC236}">
-                <a16:creationId xmlns:a16="http://schemas.microsoft.com/office/drawing/2014/main" id="{E5A94F0B-04E0-4740-8C07-578CD491F86C}"/>
+                <a16:creationId xmlns:a16="http://schemas.microsoft.com/office/drawing/2014/main" id="{1EAF9883-5A5D-4D1D-9B58-1184F72ADC96}"/>
               </a:ext>
             </a:extLst>
           </p:cNvPr>
@@ -4268,7 +4481,7 @@
           <p:cNvPr id="5" name="Date Placeholder 4">
             <a:extLst xmlns:a="http://schemas.openxmlformats.org/drawingml/2006/main">
               <a:ext uri="{FF2B5EF4-FFF2-40B4-BE49-F238E27FC236}">
-                <a16:creationId xmlns:a16="http://schemas.microsoft.com/office/drawing/2014/main" id="{D00505E8-8864-477B-B44F-9DD6129AF83C}"/>
+                <a16:creationId xmlns:a16="http://schemas.microsoft.com/office/drawing/2014/main" id="{DD931EB2-F754-4E29-A304-AAB3E3CE8BF7}"/>
               </a:ext>
             </a:extLst>
           </p:cNvPr>
@@ -4296,7 +4509,7 @@
           <p:cNvPr id="6" name="Footer Placeholder 5">
             <a:extLst xmlns:a="http://schemas.openxmlformats.org/drawingml/2006/main">
               <a:ext uri="{FF2B5EF4-FFF2-40B4-BE49-F238E27FC236}">
-                <a16:creationId xmlns:a16="http://schemas.microsoft.com/office/drawing/2014/main" id="{3C219818-9EAC-4BEF-9641-9B3153F67C3E}"/>
+                <a16:creationId xmlns:a16="http://schemas.microsoft.com/office/drawing/2014/main" id="{4B7F1061-3F35-406A-83B3-64D66007DC48}"/>
               </a:ext>
             </a:extLst>
           </p:cNvPr>
@@ -4321,7 +4534,7 @@
           <p:cNvPr id="7" name="Slide Number Placeholder 6">
             <a:extLst xmlns:a="http://schemas.openxmlformats.org/drawingml/2006/main">
               <a:ext uri="{FF2B5EF4-FFF2-40B4-BE49-F238E27FC236}">
-                <a16:creationId xmlns:a16="http://schemas.microsoft.com/office/drawing/2014/main" id="{45626AC1-37EC-4B19-8F07-968BC98DF3C2}"/>
+                <a16:creationId xmlns:a16="http://schemas.microsoft.com/office/drawing/2014/main" id="{3349B390-79F7-4FD4-A4F4-F6E0C8C64DEE}"/>
               </a:ext>
             </a:extLst>
           </p:cNvPr>
@@ -4371,7 +4584,7 @@
           <p:cNvPr id="2" name="Title Placeholder 1">
             <a:extLst xmlns:a="http://schemas.openxmlformats.org/drawingml/2006/main">
               <a:ext uri="{FF2B5EF4-FFF2-40B4-BE49-F238E27FC236}">
-                <a16:creationId xmlns:a16="http://schemas.microsoft.com/office/drawing/2014/main" id="{D967AFCF-66E8-4AF3-B7E9-A0176C4C34FF}"/>
+                <a16:creationId xmlns:a16="http://schemas.microsoft.com/office/drawing/2014/main" id="{9CB06797-2B9A-45F2-A43E-61A144DE2143}"/>
               </a:ext>
             </a:extLst>
           </p:cNvPr>
@@ -4406,7 +4619,7 @@
           <p:cNvPr id="3" name="Text Placeholder 2">
             <a:extLst xmlns:a="http://schemas.openxmlformats.org/drawingml/2006/main">
               <a:ext uri="{FF2B5EF4-FFF2-40B4-BE49-F238E27FC236}">
-                <a16:creationId xmlns:a16="http://schemas.microsoft.com/office/drawing/2014/main" id="{98975FE1-9059-4C85-B88A-5932F8D8EC6D}"/>
+                <a16:creationId xmlns:a16="http://schemas.microsoft.com/office/drawing/2014/main" id="{21E01DA1-2944-4D4A-B64D-02B9F8868201}"/>
               </a:ext>
             </a:extLst>
           </p:cNvPr>
@@ -4479,7 +4692,7 @@
           <p:cNvPr id="4" name="Date Placeholder 3">
             <a:extLst xmlns:a="http://schemas.openxmlformats.org/drawingml/2006/main">
               <a:ext uri="{FF2B5EF4-FFF2-40B4-BE49-F238E27FC236}">
-                <a16:creationId xmlns:a16="http://schemas.microsoft.com/office/drawing/2014/main" id="{207831CE-C6F9-4CA8-93B1-211C4357C36E}"/>
+                <a16:creationId xmlns:a16="http://schemas.microsoft.com/office/drawing/2014/main" id="{08CB6E7C-6B6B-4133-9A47-40F2C0E1E965}"/>
               </a:ext>
             </a:extLst>
           </p:cNvPr>
@@ -4526,7 +4739,7 @@
           <p:cNvPr id="5" name="Footer Placeholder 4">
             <a:extLst xmlns:a="http://schemas.openxmlformats.org/drawingml/2006/main">
               <a:ext uri="{FF2B5EF4-FFF2-40B4-BE49-F238E27FC236}">
-                <a16:creationId xmlns:a16="http://schemas.microsoft.com/office/drawing/2014/main" id="{2F44E118-DD89-4935-8DDC-9322FC96A003}"/>
+                <a16:creationId xmlns:a16="http://schemas.microsoft.com/office/drawing/2014/main" id="{B3292664-BC28-41D9-8CF6-6FAF426BD3C1}"/>
               </a:ext>
             </a:extLst>
           </p:cNvPr>
@@ -4570,7 +4783,7 @@
           <p:cNvPr id="6" name="Slide Number Placeholder 5">
             <a:extLst xmlns:a="http://schemas.openxmlformats.org/drawingml/2006/main">
               <a:ext uri="{FF2B5EF4-FFF2-40B4-BE49-F238E27FC236}">
-                <a16:creationId xmlns:a16="http://schemas.microsoft.com/office/drawing/2014/main" id="{5A146E75-68E9-4DE5-BAED-B7F026D51DFE}"/>
+                <a16:creationId xmlns:a16="http://schemas.microsoft.com/office/drawing/2014/main" id="{E43E24FC-C3E4-4BC7-8B8A-93C48A1A7BF9}"/>
               </a:ext>
             </a:extLst>
           </p:cNvPr>
@@ -4617,7 +4830,7 @@
           <p:cNvPr id="11" name="Picture 10">
             <a:extLst xmlns:a="http://schemas.openxmlformats.org/drawingml/2006/main">
               <a:ext uri="{FF2B5EF4-FFF2-40B4-BE49-F238E27FC236}">
-                <a16:creationId xmlns:a16="http://schemas.microsoft.com/office/drawing/2014/main" id="{EFDF8198-8A0F-4EF4-A495-A211925700D5}"/>
+                <a16:creationId xmlns:a16="http://schemas.microsoft.com/office/drawing/2014/main" id="{6E1026D2-763C-4A82-8CCF-94B9B6A92AD7}"/>
               </a:ext>
             </a:extLst>
           </p:cNvPr>
@@ -4627,7 +4840,7 @@
           <p:nvPr/>
         </p:nvPicPr>
         <p:blipFill>
-          <a:blip xmlns:r="http://schemas.openxmlformats.org/officeDocument/2006/relationships" xmlns:a="http://schemas.openxmlformats.org/drawingml/2006/main" r:embed="Ra9e12298586740b9"/>
+          <a:blip xmlns:r="http://schemas.openxmlformats.org/officeDocument/2006/relationships" xmlns:a="http://schemas.openxmlformats.org/drawingml/2006/main" r:embed="R5e71185e9bf64f9f"/>
           <a:stretch xmlns:a="http://schemas.openxmlformats.org/drawingml/2006/main">
             <a:fillRect l="0" t="0" r="0" b="0"/>
           </a:stretch>
@@ -4646,17 +4859,17 @@
   </p:cSld>
   <p:clrMap bg1="lt1" tx1="dk1" bg2="lt2" tx2="dk2" accent1="accent1" accent2="accent2" accent3="accent3" accent4="accent4" accent5="accent5" accent6="accent6" hlink="hlink" folHlink="folHlink"/>
   <p:sldLayoutIdLst>
-    <p:sldLayoutId xmlns:r="http://schemas.openxmlformats.org/officeDocument/2006/relationships" id="2147483649" r:id="R54264009f5504c71"/>
-    <p:sldLayoutId xmlns:r="http://schemas.openxmlformats.org/officeDocument/2006/relationships" id="2147483650" r:id="Rfbff0413f0c64900"/>
-    <p:sldLayoutId xmlns:r="http://schemas.openxmlformats.org/officeDocument/2006/relationships" id="2147483651" r:id="R509345720359496c"/>
-    <p:sldLayoutId xmlns:r="http://schemas.openxmlformats.org/officeDocument/2006/relationships" id="2147483652" r:id="Rde7cd18f29dc4e08"/>
-    <p:sldLayoutId xmlns:r="http://schemas.openxmlformats.org/officeDocument/2006/relationships" id="2147483653" r:id="R6a81fae6b8c24c25"/>
-    <p:sldLayoutId xmlns:r="http://schemas.openxmlformats.org/officeDocument/2006/relationships" id="2147483654" r:id="R6489326066a14191"/>
-    <p:sldLayoutId xmlns:r="http://schemas.openxmlformats.org/officeDocument/2006/relationships" id="2147483655" r:id="R097491a422e54fb2"/>
-    <p:sldLayoutId xmlns:r="http://schemas.openxmlformats.org/officeDocument/2006/relationships" id="2147483656" r:id="R64afbee8c1864d9e"/>
-    <p:sldLayoutId xmlns:r="http://schemas.openxmlformats.org/officeDocument/2006/relationships" id="2147483657" r:id="Rd1c312691c904d61"/>
-    <p:sldLayoutId xmlns:r="http://schemas.openxmlformats.org/officeDocument/2006/relationships" id="2147483658" r:id="R52187c74af57491f"/>
-    <p:sldLayoutId xmlns:r="http://schemas.openxmlformats.org/officeDocument/2006/relationships" id="2147483659" r:id="R21635cac2eeb4890"/>
+    <p:sldLayoutId xmlns:r="http://schemas.openxmlformats.org/officeDocument/2006/relationships" id="2147483649" r:id="Readff6f92e47442c"/>
+    <p:sldLayoutId xmlns:r="http://schemas.openxmlformats.org/officeDocument/2006/relationships" id="2147483650" r:id="R02a8f8ab23784fe8"/>
+    <p:sldLayoutId xmlns:r="http://schemas.openxmlformats.org/officeDocument/2006/relationships" id="2147483651" r:id="Ra9e71e6195bc4f57"/>
+    <p:sldLayoutId xmlns:r="http://schemas.openxmlformats.org/officeDocument/2006/relationships" id="2147483652" r:id="Ra992b66bb8244259"/>
+    <p:sldLayoutId xmlns:r="http://schemas.openxmlformats.org/officeDocument/2006/relationships" id="2147483653" r:id="R93b84804bc6b4983"/>
+    <p:sldLayoutId xmlns:r="http://schemas.openxmlformats.org/officeDocument/2006/relationships" id="2147483654" r:id="R215b2a899cc74e1e"/>
+    <p:sldLayoutId xmlns:r="http://schemas.openxmlformats.org/officeDocument/2006/relationships" id="2147483655" r:id="R05c3afbcfb0b41c4"/>
+    <p:sldLayoutId xmlns:r="http://schemas.openxmlformats.org/officeDocument/2006/relationships" id="2147483656" r:id="R0216c4bec220499f"/>
+    <p:sldLayoutId xmlns:r="http://schemas.openxmlformats.org/officeDocument/2006/relationships" id="2147483657" r:id="Rd45358269949454e"/>
+    <p:sldLayoutId xmlns:r="http://schemas.openxmlformats.org/officeDocument/2006/relationships" id="2147483658" r:id="R2bb953eeead6487b"/>
+    <p:sldLayoutId xmlns:r="http://schemas.openxmlformats.org/officeDocument/2006/relationships" id="2147483659" r:id="R5e2ab10b738b49e7"/>
   </p:sldLayoutIdLst>
   <p:txStyles>
     <p:titleStyle>
@@ -5280,7 +5493,7 @@
           <p:cNvPr id="2" name="Content Placeholder 2">
             <a:extLst xmlns:a="http://schemas.openxmlformats.org/drawingml/2006/main">
               <a:ext uri="{FF2B5EF4-FFF2-40B4-BE49-F238E27FC236}">
-                <a16:creationId xmlns:a16="http://schemas.microsoft.com/office/drawing/2014/main" id="{4F396B6D-21D9-4E32-A708-C8FF475CEC5D}"/>
+                <a16:creationId xmlns:a16="http://schemas.microsoft.com/office/drawing/2014/main" id="{EA46B63F-0CA0-40F8-8239-1DDAFF83B809}"/>
               </a:ext>
             </a:extLst>
           </p:cNvPr>
@@ -5300,7 +5513,7 @@
               <a:buNone/>
             </a:pPr>
             <a:r>
-              <a:t>MAUI creates the page and view model.</a:t>
+              <a:t>Add and Replace use the service.</a:t>
             </a:r>
           </a:p>
           <a:p xmlns:a="http://schemas.openxmlformats.org/drawingml/2006/main">
@@ -5308,7 +5521,7 @@
               <a:buNone/>
             </a:pPr>
             <a:r>
-              <a:t>The BOM workflow still works.</a:t>
+              <a:t>CollectionView shows the changed data.</a:t>
             </a:r>
           </a:p>
         </p:txBody>
@@ -5341,7 +5554,7 @@
           <a:lstStyle xmlns:a="http://schemas.openxmlformats.org/drawingml/2006/main"/>
           <a:p xmlns:a="http://schemas.openxmlformats.org/drawingml/2006/main">
             <a:r>
-              <a:t>Step 4 Check</a:t>
+              <a:t>Step 3: What changed?</a:t>
             </a:r>
             <a:endParaRPr/>
           </a:p>
@@ -5352,7 +5565,7 @@
           <p:cNvPr id="4" name="">
             <a:extLst xmlns:a="http://schemas.openxmlformats.org/drawingml/2006/main">
               <a:ext uri="{FF2B5EF4-FFF2-40B4-BE49-F238E27FC236}">
-                <a16:creationId xmlns:a16="http://schemas.microsoft.com/office/drawing/2014/main" id="{0B1CBE30-7E80-4FD7-AFA9-CA72F022A549}"/>
+                <a16:creationId xmlns:a16="http://schemas.microsoft.com/office/drawing/2014/main" id="{D2056076-18FF-4443-8065-9E351FA54EA9}"/>
               </a:ext>
             </a:extLst>
           </p:cNvPr>
@@ -5362,7 +5575,7 @@
           <p:nvPr/>
         </p:nvPicPr>
         <p:blipFill>
-          <a:blip xmlns:r="http://schemas.openxmlformats.org/officeDocument/2006/relationships" xmlns:a="http://schemas.openxmlformats.org/drawingml/2006/main" r:embed="Ra29fccf18a094191"/>
+          <a:blip xmlns:r="http://schemas.openxmlformats.org/officeDocument/2006/relationships" xmlns:a="http://schemas.openxmlformats.org/drawingml/2006/main" r:embed="R66437179a907437b"/>
           <a:stretch xmlns:a="http://schemas.openxmlformats.org/drawingml/2006/main"/>
         </p:blipFill>
         <p:spPr>
@@ -5378,7 +5591,7 @@
     </p:spTree>
     <p:extLst>
       <p:ext uri="{BB962C8B-B14F-4D97-AF65-F5344CB8AC3E}">
-        <p14:creationId xmlns:p14="http://schemas.microsoft.com/office/powerpoint/2010/main" val="1509428272"/>
+        <p14:creationId xmlns:p14="http://schemas.microsoft.com/office/powerpoint/2010/main" val="1087807764"/>
       </p:ext>
     </p:extLst>
   </p:cSld>
@@ -5402,7 +5615,7 @@
           <p:cNvPr id="2" name="Content Placeholder 2">
             <a:extLst xmlns:a="http://schemas.openxmlformats.org/drawingml/2006/main">
               <a:ext uri="{FF2B5EF4-FFF2-40B4-BE49-F238E27FC236}">
-                <a16:creationId xmlns:a16="http://schemas.microsoft.com/office/drawing/2014/main" id="{4F396B6D-21D9-4E32-A708-C8FF475CEC5D}"/>
+                <a16:creationId xmlns:a16="http://schemas.microsoft.com/office/drawing/2014/main" id="{EA46B63F-0CA0-40F8-8239-1DDAFF83B809}"/>
               </a:ext>
             </a:extLst>
           </p:cNvPr>
@@ -5422,7 +5635,7 @@
               <a:buNone/>
             </a:pPr>
             <a:r>
-              <a:t>Show the completed app workflow.</a:t>
+              <a:t>Register each service in MauiProgram.</a:t>
             </a:r>
           </a:p>
           <a:p xmlns:a="http://schemas.openxmlformats.org/drawingml/2006/main">
@@ -5430,15 +5643,7 @@
               <a:buNone/>
             </a:pPr>
             <a:r>
-              <a:t>Explain which responsibility changed.</a:t>
-            </a:r>
-          </a:p>
-          <a:p xmlns:a="http://schemas.openxmlformats.org/drawingml/2006/main">
-            <a:pPr lvl="0">
-              <a:buNone/>
-            </a:pPr>
-            <a:r>
-              <a:t>Check the result before the next module.</a:t>
+              <a:t>The container passes dependencies to constructors.</a:t>
             </a:r>
           </a:p>
         </p:txBody>
@@ -5471,7 +5676,7 @@
           <a:lstStyle xmlns:a="http://schemas.openxmlformats.org/drawingml/2006/main"/>
           <a:p xmlns:a="http://schemas.openxmlformats.org/drawingml/2006/main">
             <a:r>
-              <a:t>Module review</a:t>
+              <a:t>Step 4: Dependency injection</a:t>
             </a:r>
             <a:endParaRPr/>
           </a:p>
@@ -5480,7 +5685,333 @@
     </p:spTree>
     <p:extLst>
       <p:ext uri="{BB962C8B-B14F-4D97-AF65-F5344CB8AC3E}">
-        <p14:creationId xmlns:p14="http://schemas.microsoft.com/office/powerpoint/2010/main" val="502551401"/>
+        <p14:creationId xmlns:p14="http://schemas.microsoft.com/office/powerpoint/2010/main" val="995569632"/>
+      </p:ext>
+    </p:extLst>
+  </p:cSld>
+</p:sld>
+</file>
+
+<file path=ppt/slides/slide12.xml><?xml version="1.0" encoding="utf-8"?>
+<p:sld xmlns:p="http://schemas.openxmlformats.org/presentationml/2006/main">
+  <p:cSld>
+    <p:spTree>
+      <p:nvGrpSpPr>
+        <p:cNvPr id="1" name=""/>
+        <p:cNvGrpSpPr/>
+        <p:nvPr/>
+      </p:nvGrpSpPr>
+      <p:grpSpPr>
+        <a:xfrm xmlns:a="http://schemas.openxmlformats.org/drawingml/2006/main"/>
+      </p:grpSpPr>
+      <p:sp>
+        <p:nvSpPr>
+          <p:cNvPr id="2" name="Content Placeholder 2">
+            <a:extLst xmlns:a="http://schemas.openxmlformats.org/drawingml/2006/main">
+              <a:ext uri="{FF2B5EF4-FFF2-40B4-BE49-F238E27FC236}">
+                <a16:creationId xmlns:a16="http://schemas.microsoft.com/office/drawing/2014/main" id="{EA46B63F-0CA0-40F8-8239-1DDAFF83B809}"/>
+              </a:ext>
+            </a:extLst>
+          </p:cNvPr>
+          <p:cNvSpPr>
+            <a:spLocks xmlns:a="http://schemas.openxmlformats.org/drawingml/2006/main" noGrp="1"/>
+          </p:cNvSpPr>
+          <p:nvPr>
+            <p:ph idx="1"/>
+          </p:nvPr>
+        </p:nvSpPr>
+        <p:spPr/>
+        <p:txBody>
+          <a:bodyPr xmlns:a="http://schemas.openxmlformats.org/drawingml/2006/main"/>
+          <a:lstStyle xmlns:a="http://schemas.openxmlformats.org/drawingml/2006/main"/>
+          <a:p xmlns:a="http://schemas.openxmlformats.org/drawingml/2006/main">
+            <a:pPr lvl="0">
+              <a:buNone/>
+            </a:pPr>
+            <a:r>
+              <a:t>MAUI creates the page and view model.</a:t>
+            </a:r>
+          </a:p>
+          <a:p xmlns:a="http://schemas.openxmlformats.org/drawingml/2006/main">
+            <a:pPr lvl="0">
+              <a:buNone/>
+            </a:pPr>
+            <a:r>
+              <a:t>The BOM workflow still works.</a:t>
+            </a:r>
+          </a:p>
+        </p:txBody>
+      </p:sp>
+      <p:sp>
+        <p:nvSpPr>
+          <p:cNvPr id="3" name="Title Placeholder 1">
+            <a:extLst xmlns:a="http://schemas.openxmlformats.org/drawingml/2006/main">
+              <a:ext uri="{FF2B5EF4-FFF2-40B4-BE49-F238E27FC236}">
+                <a16:creationId xmlns:a16="http://schemas.microsoft.com/office/drawing/2014/main" id="{2DF4F548-EDEF-186D-6633-AF1ABC814BC1}"/>
+              </a:ext>
+            </a:extLst>
+          </p:cNvPr>
+          <p:cNvSpPr>
+            <a:spLocks xmlns:a="http://schemas.openxmlformats.org/drawingml/2006/main" noGrp="1"/>
+          </p:cNvSpPr>
+          <p:nvPr>
+            <p:ph type="title" idx="0"/>
+          </p:nvPr>
+        </p:nvSpPr>
+        <p:spPr>
+          <a:prstGeom xmlns:a="http://schemas.openxmlformats.org/drawingml/2006/main" prst="rect">
+            <a:avLst/>
+          </a:prstGeom>
+        </p:spPr>
+        <p:txBody>
+          <a:bodyPr xmlns:a="http://schemas.openxmlformats.org/drawingml/2006/main" vert="horz" lIns="91440" tIns="45720" rIns="91440" bIns="45720" anchor="ctr">
+            <a:normAutofit fontScale="100000"/>
+          </a:bodyPr>
+          <a:lstStyle xmlns:a="http://schemas.openxmlformats.org/drawingml/2006/main"/>
+          <a:p xmlns:a="http://schemas.openxmlformats.org/drawingml/2006/main">
+            <a:r>
+              <a:t>Step 4: What changed?</a:t>
+            </a:r>
+            <a:endParaRPr/>
+          </a:p>
+        </p:txBody>
+      </p:sp>
+      <p:pic>
+        <p:nvPicPr>
+          <p:cNvPr id="4" name="">
+            <a:extLst xmlns:a="http://schemas.openxmlformats.org/drawingml/2006/main">
+              <a:ext uri="{FF2B5EF4-FFF2-40B4-BE49-F238E27FC236}">
+                <a16:creationId xmlns:a16="http://schemas.microsoft.com/office/drawing/2014/main" id="{7733DDD6-8759-45A5-9A02-FF13FCD8BCF5}"/>
+              </a:ext>
+            </a:extLst>
+          </p:cNvPr>
+          <p:cNvPicPr>
+            <a:picLocks xmlns:a="http://schemas.openxmlformats.org/drawingml/2006/main" noChangeAspect="1"/>
+          </p:cNvPicPr>
+          <p:nvPr/>
+        </p:nvPicPr>
+        <p:blipFill>
+          <a:blip xmlns:r="http://schemas.openxmlformats.org/officeDocument/2006/relationships" xmlns:a="http://schemas.openxmlformats.org/drawingml/2006/main" r:embed="Ra702efce57da4b5e"/>
+          <a:stretch xmlns:a="http://schemas.openxmlformats.org/drawingml/2006/main"/>
+        </p:blipFill>
+        <p:spPr>
+          <a:xfrm xmlns:a="http://schemas.openxmlformats.org/drawingml/2006/main">
+            <a:off x="3133823" y="3190875"/>
+            <a:ext cx="5924355" cy="3048000"/>
+          </a:xfrm>
+          <a:prstGeom xmlns:a="http://schemas.openxmlformats.org/drawingml/2006/main" prst="rect">
+            <a:avLst/>
+          </a:prstGeom>
+        </p:spPr>
+      </p:pic>
+    </p:spTree>
+    <p:extLst>
+      <p:ext uri="{BB962C8B-B14F-4D97-AF65-F5344CB8AC3E}">
+        <p14:creationId xmlns:p14="http://schemas.microsoft.com/office/powerpoint/2010/main" val="2025011205"/>
+      </p:ext>
+    </p:extLst>
+  </p:cSld>
+</p:sld>
+</file>
+
+<file path=ppt/slides/slide13.xml><?xml version="1.0" encoding="utf-8"?>
+<p:sld xmlns:p="http://schemas.openxmlformats.org/presentationml/2006/main">
+  <p:cSld>
+    <p:spTree>
+      <p:nvGrpSpPr>
+        <p:cNvPr id="1" name=""/>
+        <p:cNvGrpSpPr/>
+        <p:nvPr/>
+      </p:nvGrpSpPr>
+      <p:grpSpPr>
+        <a:xfrm xmlns:a="http://schemas.openxmlformats.org/drawingml/2006/main"/>
+      </p:grpSpPr>
+      <p:sp>
+        <p:nvSpPr>
+          <p:cNvPr id="2" name="Content Placeholder 2">
+            <a:extLst xmlns:a="http://schemas.openxmlformats.org/drawingml/2006/main">
+              <a:ext uri="{FF2B5EF4-FFF2-40B4-BE49-F238E27FC236}">
+                <a16:creationId xmlns:a16="http://schemas.microsoft.com/office/drawing/2014/main" id="{EA46B63F-0CA0-40F8-8239-1DDAFF83B809}"/>
+              </a:ext>
+            </a:extLst>
+          </p:cNvPr>
+          <p:cNvSpPr>
+            <a:spLocks xmlns:a="http://schemas.openxmlformats.org/drawingml/2006/main" noGrp="1"/>
+          </p:cNvSpPr>
+          <p:nvPr>
+            <p:ph idx="1"/>
+          </p:nvPr>
+        </p:nvSpPr>
+        <p:spPr/>
+        <p:txBody>
+          <a:bodyPr xmlns:a="http://schemas.openxmlformats.org/drawingml/2006/main"/>
+          <a:lstStyle xmlns:a="http://schemas.openxmlformats.org/drawingml/2006/main"/>
+          <a:p xmlns:a="http://schemas.openxmlformats.org/drawingml/2006/main">
+            <a:pPr lvl="0">
+              <a:buNone/>
+            </a:pPr>
+            <a:r>
+              <a:t>I can trace IBomService into a constructor.</a:t>
+            </a:r>
+          </a:p>
+          <a:p xmlns:a="http://schemas.openxmlformats.org/drawingml/2006/main">
+            <a:pPr lvl="0">
+              <a:buNone/>
+            </a:pPr>
+            <a:r>
+              <a:t>I can explain why the service owns BOM data.</a:t>
+            </a:r>
+          </a:p>
+          <a:p xmlns:a="http://schemas.openxmlformats.org/drawingml/2006/main">
+            <a:pPr lvl="0">
+              <a:buNone/>
+            </a:pPr>
+            <a:r>
+              <a:t>I can choose a lifetime for shared data.</a:t>
+            </a:r>
+          </a:p>
+        </p:txBody>
+      </p:sp>
+      <p:sp>
+        <p:nvSpPr>
+          <p:cNvPr id="3" name="Title Placeholder 1">
+            <a:extLst xmlns:a="http://schemas.openxmlformats.org/drawingml/2006/main">
+              <a:ext uri="{FF2B5EF4-FFF2-40B4-BE49-F238E27FC236}">
+                <a16:creationId xmlns:a16="http://schemas.microsoft.com/office/drawing/2014/main" id="{2DF4F548-EDEF-186D-6633-AF1ABC814BC1}"/>
+              </a:ext>
+            </a:extLst>
+          </p:cNvPr>
+          <p:cNvSpPr>
+            <a:spLocks xmlns:a="http://schemas.openxmlformats.org/drawingml/2006/main" noGrp="1"/>
+          </p:cNvSpPr>
+          <p:nvPr>
+            <p:ph type="title" idx="0"/>
+          </p:nvPr>
+        </p:nvSpPr>
+        <p:spPr>
+          <a:prstGeom xmlns:a="http://schemas.openxmlformats.org/drawingml/2006/main" prst="rect">
+            <a:avLst/>
+          </a:prstGeom>
+        </p:spPr>
+        <p:txBody>
+          <a:bodyPr xmlns:a="http://schemas.openxmlformats.org/drawingml/2006/main" vert="horz" lIns="91440" tIns="45720" rIns="91440" bIns="45720" anchor="ctr">
+            <a:normAutofit fontScale="100000"/>
+          </a:bodyPr>
+          <a:lstStyle xmlns:a="http://schemas.openxmlformats.org/drawingml/2006/main"/>
+          <a:p xmlns:a="http://schemas.openxmlformats.org/drawingml/2006/main">
+            <a:r>
+              <a:t>What you can now explain</a:t>
+            </a:r>
+            <a:endParaRPr/>
+          </a:p>
+        </p:txBody>
+      </p:sp>
+    </p:spTree>
+    <p:extLst>
+      <p:ext uri="{BB962C8B-B14F-4D97-AF65-F5344CB8AC3E}">
+        <p14:creationId xmlns:p14="http://schemas.microsoft.com/office/powerpoint/2010/main" val="1034297340"/>
+      </p:ext>
+    </p:extLst>
+  </p:cSld>
+</p:sld>
+</file>
+
+<file path=ppt/slides/slide14.xml><?xml version="1.0" encoding="utf-8"?>
+<p:sld xmlns:p="http://schemas.openxmlformats.org/presentationml/2006/main">
+  <p:cSld>
+    <p:spTree>
+      <p:nvGrpSpPr>
+        <p:cNvPr id="1" name=""/>
+        <p:cNvGrpSpPr/>
+        <p:nvPr/>
+      </p:nvGrpSpPr>
+      <p:grpSpPr>
+        <a:xfrm xmlns:a="http://schemas.openxmlformats.org/drawingml/2006/main"/>
+      </p:grpSpPr>
+      <p:sp>
+        <p:nvSpPr>
+          <p:cNvPr id="2" name="Content Placeholder 2">
+            <a:extLst xmlns:a="http://schemas.openxmlformats.org/drawingml/2006/main">
+              <a:ext uri="{FF2B5EF4-FFF2-40B4-BE49-F238E27FC236}">
+                <a16:creationId xmlns:a16="http://schemas.microsoft.com/office/drawing/2014/main" id="{EA46B63F-0CA0-40F8-8239-1DDAFF83B809}"/>
+              </a:ext>
+            </a:extLst>
+          </p:cNvPr>
+          <p:cNvSpPr>
+            <a:spLocks xmlns:a="http://schemas.openxmlformats.org/drawingml/2006/main" noGrp="1"/>
+          </p:cNvSpPr>
+          <p:nvPr>
+            <p:ph idx="1"/>
+          </p:nvPr>
+        </p:nvSpPr>
+        <p:spPr/>
+        <p:txBody>
+          <a:bodyPr xmlns:a="http://schemas.openxmlformats.org/drawingml/2006/main"/>
+          <a:lstStyle xmlns:a="http://schemas.openxmlformats.org/drawingml/2006/main"/>
+          <a:p xmlns:a="http://schemas.openxmlformats.org/drawingml/2006/main">
+            <a:pPr lvl="0">
+              <a:buNone/>
+            </a:pPr>
+            <a:r>
+              <a:t>Dependency injection</a:t>
+            </a:r>
+          </a:p>
+          <a:p xmlns:a="http://schemas.openxmlformats.org/drawingml/2006/main">
+            <a:pPr lvl="0">
+              <a:buNone/>
+            </a:pPr>
+            <a:r>
+              <a:t>Search Microsoft Learn for this topic.</a:t>
+            </a:r>
+          </a:p>
+          <a:p xmlns:a="http://schemas.openxmlformats.org/drawingml/2006/main">
+            <a:pPr lvl="0">
+              <a:buNone/>
+            </a:pPr>
+            <a:r>
+              <a:t>Try one example in a small test page.</a:t>
+            </a:r>
+          </a:p>
+        </p:txBody>
+      </p:sp>
+      <p:sp>
+        <p:nvSpPr>
+          <p:cNvPr id="3" name="Title Placeholder 1">
+            <a:extLst xmlns:a="http://schemas.openxmlformats.org/drawingml/2006/main">
+              <a:ext uri="{FF2B5EF4-FFF2-40B4-BE49-F238E27FC236}">
+                <a16:creationId xmlns:a16="http://schemas.microsoft.com/office/drawing/2014/main" id="{2DF4F548-EDEF-186D-6633-AF1ABC814BC1}"/>
+              </a:ext>
+            </a:extLst>
+          </p:cNvPr>
+          <p:cNvSpPr>
+            <a:spLocks xmlns:a="http://schemas.openxmlformats.org/drawingml/2006/main" noGrp="1"/>
+          </p:cNvSpPr>
+          <p:nvPr>
+            <p:ph type="title" idx="0"/>
+          </p:nvPr>
+        </p:nvSpPr>
+        <p:spPr>
+          <a:prstGeom xmlns:a="http://schemas.openxmlformats.org/drawingml/2006/main" prst="rect">
+            <a:avLst/>
+          </a:prstGeom>
+        </p:spPr>
+        <p:txBody>
+          <a:bodyPr xmlns:a="http://schemas.openxmlformats.org/drawingml/2006/main" vert="horz" lIns="91440" tIns="45720" rIns="91440" bIns="45720" anchor="ctr">
+            <a:normAutofit fontScale="100000"/>
+          </a:bodyPr>
+          <a:lstStyle xmlns:a="http://schemas.openxmlformats.org/drawingml/2006/main"/>
+          <a:p xmlns:a="http://schemas.openxmlformats.org/drawingml/2006/main">
+            <a:r>
+              <a:t>Read more in MAUI documentation</a:t>
+            </a:r>
+            <a:endParaRPr/>
+          </a:p>
+        </p:txBody>
+      </p:sp>
+    </p:spTree>
+    <p:extLst>
+      <p:ext uri="{BB962C8B-B14F-4D97-AF65-F5344CB8AC3E}">
+        <p14:creationId xmlns:p14="http://schemas.microsoft.com/office/powerpoint/2010/main" val="31439753"/>
       </p:ext>
     </p:extLst>
   </p:cSld>
@@ -5504,7 +6035,7 @@
           <p:cNvPr id="2" name="Content Placeholder 2">
             <a:extLst xmlns:a="http://schemas.openxmlformats.org/drawingml/2006/main">
               <a:ext uri="{FF2B5EF4-FFF2-40B4-BE49-F238E27FC236}">
-                <a16:creationId xmlns:a16="http://schemas.microsoft.com/office/drawing/2014/main" id="{4F396B6D-21D9-4E32-A708-C8FF475CEC5D}"/>
+                <a16:creationId xmlns:a16="http://schemas.microsoft.com/office/drawing/2014/main" id="{EA46B63F-0CA0-40F8-8239-1DDAFF83B809}"/>
               </a:ext>
             </a:extLst>
           </p:cNvPr>
@@ -5573,7 +6104,7 @@
           <a:lstStyle xmlns:a="http://schemas.openxmlformats.org/drawingml/2006/main"/>
           <a:p xmlns:a="http://schemas.openxmlformats.org/drawingml/2006/main">
             <a:r>
-              <a:t>Exercise overview</a:t>
+              <a:t>What you will build</a:t>
             </a:r>
             <a:endParaRPr/>
           </a:p>
@@ -5582,7 +6113,7 @@
     </p:spTree>
     <p:extLst>
       <p:ext uri="{BB962C8B-B14F-4D97-AF65-F5344CB8AC3E}">
-        <p14:creationId xmlns:p14="http://schemas.microsoft.com/office/powerpoint/2010/main" val="735162688"/>
+        <p14:creationId xmlns:p14="http://schemas.microsoft.com/office/powerpoint/2010/main" val="2012910989"/>
       </p:ext>
     </p:extLst>
   </p:cSld>
@@ -5606,7 +6137,7 @@
           <p:cNvPr id="2" name="Content Placeholder 2">
             <a:extLst xmlns:a="http://schemas.openxmlformats.org/drawingml/2006/main">
               <a:ext uri="{FF2B5EF4-FFF2-40B4-BE49-F238E27FC236}">
-                <a16:creationId xmlns:a16="http://schemas.microsoft.com/office/drawing/2014/main" id="{4F396B6D-21D9-4E32-A708-C8FF475CEC5D}"/>
+                <a16:creationId xmlns:a16="http://schemas.microsoft.com/office/drawing/2014/main" id="{EA46B63F-0CA0-40F8-8239-1DDAFF83B809}"/>
               </a:ext>
             </a:extLst>
           </p:cNvPr>
@@ -5626,7 +6157,7 @@
               <a:buNone/>
             </a:pPr>
             <a:r>
-              <a:t>The view model currently holds the list.</a:t>
+              <a:t>MauiProgram registers services and view models.</a:t>
             </a:r>
           </a:p>
           <a:p xmlns:a="http://schemas.openxmlformats.org/drawingml/2006/main">
@@ -5634,7 +6165,15 @@
               <a:buNone/>
             </a:pPr>
             <a:r>
-              <a:t>A service can own shared BOM data.</a:t>
+              <a:t>The container calls a constructor with its dependencies.</a:t>
+            </a:r>
+          </a:p>
+          <a:p xmlns:a="http://schemas.openxmlformats.org/drawingml/2006/main">
+            <a:pPr lvl="0">
+              <a:buNone/>
+            </a:pPr>
+            <a:r>
+              <a:t>An interface lets the view model use a service contract.</a:t>
             </a:r>
           </a:p>
         </p:txBody>
@@ -5662,21 +6201,49 @@
         </p:spPr>
         <p:txBody>
           <a:bodyPr xmlns:a="http://schemas.openxmlformats.org/drawingml/2006/main" vert="horz" lIns="91440" tIns="45720" rIns="91440" bIns="45720" anchor="ctr">
-            <a:normAutofit fontScale="100000"/>
+            <a:normAutofit fontScale="86250"/>
           </a:bodyPr>
           <a:lstStyle xmlns:a="http://schemas.openxmlformats.org/drawingml/2006/main"/>
           <a:p xmlns:a="http://schemas.openxmlformats.org/drawingml/2006/main">
             <a:r>
-              <a:t>Step 1 Data ownership</a:t>
+              <a:t>Dependency injection supplies shared objects</a:t>
             </a:r>
             <a:endParaRPr/>
           </a:p>
         </p:txBody>
       </p:sp>
+      <p:pic>
+        <p:nvPicPr>
+          <p:cNvPr id="4" name="">
+            <a:extLst xmlns:a="http://schemas.openxmlformats.org/drawingml/2006/main">
+              <a:ext uri="{FF2B5EF4-FFF2-40B4-BE49-F238E27FC236}">
+                <a16:creationId xmlns:a16="http://schemas.microsoft.com/office/drawing/2014/main" id="{2E1E1C5C-BC75-4647-B2AB-6BE6D8C1BBDD}"/>
+              </a:ext>
+            </a:extLst>
+          </p:cNvPr>
+          <p:cNvPicPr>
+            <a:picLocks xmlns:a="http://schemas.openxmlformats.org/drawingml/2006/main" noChangeAspect="1"/>
+          </p:cNvPicPr>
+          <p:nvPr/>
+        </p:nvPicPr>
+        <p:blipFill>
+          <a:blip xmlns:r="http://schemas.openxmlformats.org/officeDocument/2006/relationships" xmlns:a="http://schemas.openxmlformats.org/drawingml/2006/main" r:embed="R2521e5d0e6444301"/>
+          <a:stretch xmlns:a="http://schemas.openxmlformats.org/drawingml/2006/main"/>
+        </p:blipFill>
+        <p:spPr>
+          <a:xfrm xmlns:a="http://schemas.openxmlformats.org/drawingml/2006/main">
+            <a:off x="3133823" y="3190875"/>
+            <a:ext cx="5924355" cy="3048000"/>
+          </a:xfrm>
+          <a:prstGeom xmlns:a="http://schemas.openxmlformats.org/drawingml/2006/main" prst="rect">
+            <a:avLst/>
+          </a:prstGeom>
+        </p:spPr>
+      </p:pic>
     </p:spTree>
     <p:extLst>
       <p:ext uri="{BB962C8B-B14F-4D97-AF65-F5344CB8AC3E}">
-        <p14:creationId xmlns:p14="http://schemas.microsoft.com/office/powerpoint/2010/main" val="1833039850"/>
+        <p14:creationId xmlns:p14="http://schemas.microsoft.com/office/powerpoint/2010/main" val="1678146431"/>
       </p:ext>
     </p:extLst>
   </p:cSld>
@@ -5700,7 +6267,7 @@
           <p:cNvPr id="2" name="Content Placeholder 2">
             <a:extLst xmlns:a="http://schemas.openxmlformats.org/drawingml/2006/main">
               <a:ext uri="{FF2B5EF4-FFF2-40B4-BE49-F238E27FC236}">
-                <a16:creationId xmlns:a16="http://schemas.microsoft.com/office/drawing/2014/main" id="{4F396B6D-21D9-4E32-A708-C8FF475CEC5D}"/>
+                <a16:creationId xmlns:a16="http://schemas.microsoft.com/office/drawing/2014/main" id="{EA46B63F-0CA0-40F8-8239-1DDAFF83B809}"/>
               </a:ext>
             </a:extLst>
           </p:cNvPr>
@@ -5720,7 +6287,7 @@
               <a:buNone/>
             </a:pPr>
             <a:r>
-              <a:t>Name the owner of Items.</a:t>
+              <a:t>The BOM service owns the item collection.</a:t>
             </a:r>
           </a:p>
           <a:p xmlns:a="http://schemas.openxmlformats.org/drawingml/2006/main">
@@ -5728,7 +6295,15 @@
               <a:buNone/>
             </a:pPr>
             <a:r>
-              <a:t>Keep commands in the view model.</a:t>
+              <a:t>The view model owns user decisions and commands.</a:t>
+            </a:r>
+          </a:p>
+          <a:p xmlns:a="http://schemas.openxmlformats.org/drawingml/2006/main">
+            <a:pPr lvl="0">
+              <a:buNone/>
+            </a:pPr>
+            <a:r>
+              <a:t>The page displays the result through bindings.</a:t>
             </a:r>
           </a:p>
         </p:txBody>
@@ -5761,44 +6336,16 @@
           <a:lstStyle xmlns:a="http://schemas.openxmlformats.org/drawingml/2006/main"/>
           <a:p xmlns:a="http://schemas.openxmlformats.org/drawingml/2006/main">
             <a:r>
-              <a:t>Step 1 Check</a:t>
+              <a:t>From C# to the screen</a:t>
             </a:r>
             <a:endParaRPr/>
           </a:p>
         </p:txBody>
       </p:sp>
-      <p:pic>
-        <p:nvPicPr>
-          <p:cNvPr id="4" name="">
-            <a:extLst xmlns:a="http://schemas.openxmlformats.org/drawingml/2006/main">
-              <a:ext uri="{FF2B5EF4-FFF2-40B4-BE49-F238E27FC236}">
-                <a16:creationId xmlns:a16="http://schemas.microsoft.com/office/drawing/2014/main" id="{8610C7E6-FD6A-4037-959B-23C8C48BFFA3}"/>
-              </a:ext>
-            </a:extLst>
-          </p:cNvPr>
-          <p:cNvPicPr>
-            <a:picLocks xmlns:a="http://schemas.openxmlformats.org/drawingml/2006/main" noChangeAspect="1"/>
-          </p:cNvPicPr>
-          <p:nvPr/>
-        </p:nvPicPr>
-        <p:blipFill>
-          <a:blip xmlns:r="http://schemas.openxmlformats.org/officeDocument/2006/relationships" xmlns:a="http://schemas.openxmlformats.org/drawingml/2006/main" r:embed="Ra66c5eb697d840b5"/>
-          <a:stretch xmlns:a="http://schemas.openxmlformats.org/drawingml/2006/main"/>
-        </p:blipFill>
-        <p:spPr>
-          <a:xfrm xmlns:a="http://schemas.openxmlformats.org/drawingml/2006/main">
-            <a:off x="3133823" y="3190875"/>
-            <a:ext cx="5924355" cy="3048000"/>
-          </a:xfrm>
-          <a:prstGeom xmlns:a="http://schemas.openxmlformats.org/drawingml/2006/main" prst="rect">
-            <a:avLst/>
-          </a:prstGeom>
-        </p:spPr>
-      </p:pic>
     </p:spTree>
     <p:extLst>
       <p:ext uri="{BB962C8B-B14F-4D97-AF65-F5344CB8AC3E}">
-        <p14:creationId xmlns:p14="http://schemas.microsoft.com/office/powerpoint/2010/main" val="1368011053"/>
+        <p14:creationId xmlns:p14="http://schemas.microsoft.com/office/powerpoint/2010/main" val="1091063205"/>
       </p:ext>
     </p:extLst>
   </p:cSld>
@@ -5822,7 +6369,7 @@
           <p:cNvPr id="2" name="Content Placeholder 2">
             <a:extLst xmlns:a="http://schemas.openxmlformats.org/drawingml/2006/main">
               <a:ext uri="{FF2B5EF4-FFF2-40B4-BE49-F238E27FC236}">
-                <a16:creationId xmlns:a16="http://schemas.microsoft.com/office/drawing/2014/main" id="{4F396B6D-21D9-4E32-A708-C8FF475CEC5D}"/>
+                <a16:creationId xmlns:a16="http://schemas.microsoft.com/office/drawing/2014/main" id="{EA46B63F-0CA0-40F8-8239-1DDAFF83B809}"/>
               </a:ext>
             </a:extLst>
           </p:cNvPr>
@@ -5842,7 +6389,7 @@
               <a:buNone/>
             </a:pPr>
             <a:r>
-              <a:t>IBomService states the available operations.</a:t>
+              <a:t>The view model currently holds the list.</a:t>
             </a:r>
           </a:p>
           <a:p xmlns:a="http://schemas.openxmlformats.org/drawingml/2006/main">
@@ -5850,7 +6397,7 @@
               <a:buNone/>
             </a:pPr>
             <a:r>
-              <a:t>The view model depends on the contract.</a:t>
+              <a:t>A service can own shared BOM data.</a:t>
             </a:r>
           </a:p>
         </p:txBody>
@@ -5883,7 +6430,7 @@
           <a:lstStyle xmlns:a="http://schemas.openxmlformats.org/drawingml/2006/main"/>
           <a:p xmlns:a="http://schemas.openxmlformats.org/drawingml/2006/main">
             <a:r>
-              <a:t>Step 2 Service contract</a:t>
+              <a:t>Step 1: Data ownership</a:t>
             </a:r>
             <a:endParaRPr/>
           </a:p>
@@ -5892,7 +6439,7 @@
     </p:spTree>
     <p:extLst>
       <p:ext uri="{BB962C8B-B14F-4D97-AF65-F5344CB8AC3E}">
-        <p14:creationId xmlns:p14="http://schemas.microsoft.com/office/powerpoint/2010/main" val="1815454881"/>
+        <p14:creationId xmlns:p14="http://schemas.microsoft.com/office/powerpoint/2010/main" val="1159556543"/>
       </p:ext>
     </p:extLst>
   </p:cSld>
@@ -5916,7 +6463,7 @@
           <p:cNvPr id="2" name="Content Placeholder 2">
             <a:extLst xmlns:a="http://schemas.openxmlformats.org/drawingml/2006/main">
               <a:ext uri="{FF2B5EF4-FFF2-40B4-BE49-F238E27FC236}">
-                <a16:creationId xmlns:a16="http://schemas.microsoft.com/office/drawing/2014/main" id="{4F396B6D-21D9-4E32-A708-C8FF475CEC5D}"/>
+                <a16:creationId xmlns:a16="http://schemas.microsoft.com/office/drawing/2014/main" id="{EA46B63F-0CA0-40F8-8239-1DDAFF83B809}"/>
               </a:ext>
             </a:extLst>
           </p:cNvPr>
@@ -5936,7 +6483,7 @@
               <a:buNone/>
             </a:pPr>
             <a:r>
-              <a:t>The interface has Items and change methods.</a:t>
+              <a:t>Name the owner of Items.</a:t>
             </a:r>
           </a:p>
           <a:p xmlns:a="http://schemas.openxmlformats.org/drawingml/2006/main">
@@ -5944,7 +6491,7 @@
               <a:buNone/>
             </a:pPr>
             <a:r>
-              <a:t>It has no page or dialog code.</a:t>
+              <a:t>Keep commands in the view model.</a:t>
             </a:r>
           </a:p>
         </p:txBody>
@@ -5977,44 +6524,16 @@
           <a:lstStyle xmlns:a="http://schemas.openxmlformats.org/drawingml/2006/main"/>
           <a:p xmlns:a="http://schemas.openxmlformats.org/drawingml/2006/main">
             <a:r>
-              <a:t>Step 2 Check</a:t>
+              <a:t>Step 1: What changed?</a:t>
             </a:r>
             <a:endParaRPr/>
           </a:p>
         </p:txBody>
       </p:sp>
-      <p:pic>
-        <p:nvPicPr>
-          <p:cNvPr id="4" name="">
-            <a:extLst xmlns:a="http://schemas.openxmlformats.org/drawingml/2006/main">
-              <a:ext uri="{FF2B5EF4-FFF2-40B4-BE49-F238E27FC236}">
-                <a16:creationId xmlns:a16="http://schemas.microsoft.com/office/drawing/2014/main" id="{CB054119-954A-4819-9625-2B72AB93590E}"/>
-              </a:ext>
-            </a:extLst>
-          </p:cNvPr>
-          <p:cNvPicPr>
-            <a:picLocks xmlns:a="http://schemas.openxmlformats.org/drawingml/2006/main" noChangeAspect="1"/>
-          </p:cNvPicPr>
-          <p:nvPr/>
-        </p:nvPicPr>
-        <p:blipFill>
-          <a:blip xmlns:r="http://schemas.openxmlformats.org/officeDocument/2006/relationships" xmlns:a="http://schemas.openxmlformats.org/drawingml/2006/main" r:embed="Rd6aec0ada37f4fad"/>
-          <a:stretch xmlns:a="http://schemas.openxmlformats.org/drawingml/2006/main"/>
-        </p:blipFill>
-        <p:spPr>
-          <a:xfrm xmlns:a="http://schemas.openxmlformats.org/drawingml/2006/main">
-            <a:off x="3133823" y="3190875"/>
-            <a:ext cx="5924355" cy="3048000"/>
-          </a:xfrm>
-          <a:prstGeom xmlns:a="http://schemas.openxmlformats.org/drawingml/2006/main" prst="rect">
-            <a:avLst/>
-          </a:prstGeom>
-        </p:spPr>
-      </p:pic>
     </p:spTree>
     <p:extLst>
       <p:ext uri="{BB962C8B-B14F-4D97-AF65-F5344CB8AC3E}">
-        <p14:creationId xmlns:p14="http://schemas.microsoft.com/office/powerpoint/2010/main" val="1408157147"/>
+        <p14:creationId xmlns:p14="http://schemas.microsoft.com/office/powerpoint/2010/main" val="991040381"/>
       </p:ext>
     </p:extLst>
   </p:cSld>
@@ -6038,7 +6557,7 @@
           <p:cNvPr id="2" name="Content Placeholder 2">
             <a:extLst xmlns:a="http://schemas.openxmlformats.org/drawingml/2006/main">
               <a:ext uri="{FF2B5EF4-FFF2-40B4-BE49-F238E27FC236}">
-                <a16:creationId xmlns:a16="http://schemas.microsoft.com/office/drawing/2014/main" id="{4F396B6D-21D9-4E32-A708-C8FF475CEC5D}"/>
+                <a16:creationId xmlns:a16="http://schemas.microsoft.com/office/drawing/2014/main" id="{EA46B63F-0CA0-40F8-8239-1DDAFF83B809}"/>
               </a:ext>
             </a:extLst>
           </p:cNvPr>
@@ -6058,7 +6577,7 @@
               <a:buNone/>
             </a:pPr>
             <a:r>
-              <a:t>InMemoryBomService implements the contract.</a:t>
+              <a:t>IBomService states the available operations.</a:t>
             </a:r>
           </a:p>
           <a:p xmlns:a="http://schemas.openxmlformats.org/drawingml/2006/main">
@@ -6066,7 +6585,7 @@
               <a:buNone/>
             </a:pPr>
             <a:r>
-              <a:t>It keeps the BOM for the current app run.</a:t>
+              <a:t>The view model depends on the contract.</a:t>
             </a:r>
           </a:p>
         </p:txBody>
@@ -6099,7 +6618,7 @@
           <a:lstStyle xmlns:a="http://schemas.openxmlformats.org/drawingml/2006/main"/>
           <a:p xmlns:a="http://schemas.openxmlformats.org/drawingml/2006/main">
             <a:r>
-              <a:t>Step 3 In-memory service</a:t>
+              <a:t>Step 2: Service contract</a:t>
             </a:r>
             <a:endParaRPr/>
           </a:p>
@@ -6108,7 +6627,7 @@
     </p:spTree>
     <p:extLst>
       <p:ext uri="{BB962C8B-B14F-4D97-AF65-F5344CB8AC3E}">
-        <p14:creationId xmlns:p14="http://schemas.microsoft.com/office/powerpoint/2010/main" val="1648186811"/>
+        <p14:creationId xmlns:p14="http://schemas.microsoft.com/office/powerpoint/2010/main" val="1116223096"/>
       </p:ext>
     </p:extLst>
   </p:cSld>
@@ -6132,7 +6651,7 @@
           <p:cNvPr id="2" name="Content Placeholder 2">
             <a:extLst xmlns:a="http://schemas.openxmlformats.org/drawingml/2006/main">
               <a:ext uri="{FF2B5EF4-FFF2-40B4-BE49-F238E27FC236}">
-                <a16:creationId xmlns:a16="http://schemas.microsoft.com/office/drawing/2014/main" id="{4F396B6D-21D9-4E32-A708-C8FF475CEC5D}"/>
+                <a16:creationId xmlns:a16="http://schemas.microsoft.com/office/drawing/2014/main" id="{EA46B63F-0CA0-40F8-8239-1DDAFF83B809}"/>
               </a:ext>
             </a:extLst>
           </p:cNvPr>
@@ -6152,7 +6671,7 @@
               <a:buNone/>
             </a:pPr>
             <a:r>
-              <a:t>Add and Replace use the service.</a:t>
+              <a:t>The interface has Items and change methods.</a:t>
             </a:r>
           </a:p>
           <a:p xmlns:a="http://schemas.openxmlformats.org/drawingml/2006/main">
@@ -6160,7 +6679,7 @@
               <a:buNone/>
             </a:pPr>
             <a:r>
-              <a:t>CollectionView shows the changed data.</a:t>
+              <a:t>It has no page or dialog code.</a:t>
             </a:r>
           </a:p>
         </p:txBody>
@@ -6193,7 +6712,7 @@
           <a:lstStyle xmlns:a="http://schemas.openxmlformats.org/drawingml/2006/main"/>
           <a:p xmlns:a="http://schemas.openxmlformats.org/drawingml/2006/main">
             <a:r>
-              <a:t>Step 3 Check</a:t>
+              <a:t>Step 2: What changed?</a:t>
             </a:r>
             <a:endParaRPr/>
           </a:p>
@@ -6204,7 +6723,7 @@
           <p:cNvPr id="4" name="">
             <a:extLst xmlns:a="http://schemas.openxmlformats.org/drawingml/2006/main">
               <a:ext uri="{FF2B5EF4-FFF2-40B4-BE49-F238E27FC236}">
-                <a16:creationId xmlns:a16="http://schemas.microsoft.com/office/drawing/2014/main" id="{2C7A22B0-675F-4966-99BE-C9C59F8921FE}"/>
+                <a16:creationId xmlns:a16="http://schemas.microsoft.com/office/drawing/2014/main" id="{A521EB43-495D-4AC4-8015-6FFB342C01BA}"/>
               </a:ext>
             </a:extLst>
           </p:cNvPr>
@@ -6214,7 +6733,7 @@
           <p:nvPr/>
         </p:nvPicPr>
         <p:blipFill>
-          <a:blip xmlns:r="http://schemas.openxmlformats.org/officeDocument/2006/relationships" xmlns:a="http://schemas.openxmlformats.org/drawingml/2006/main" r:embed="R5b94c40824944c42"/>
+          <a:blip xmlns:r="http://schemas.openxmlformats.org/officeDocument/2006/relationships" xmlns:a="http://schemas.openxmlformats.org/drawingml/2006/main" r:embed="R7a9f48bbe592483e"/>
           <a:stretch xmlns:a="http://schemas.openxmlformats.org/drawingml/2006/main"/>
         </p:blipFill>
         <p:spPr>
@@ -6230,7 +6749,7 @@
     </p:spTree>
     <p:extLst>
       <p:ext uri="{BB962C8B-B14F-4D97-AF65-F5344CB8AC3E}">
-        <p14:creationId xmlns:p14="http://schemas.microsoft.com/office/powerpoint/2010/main" val="838689279"/>
+        <p14:creationId xmlns:p14="http://schemas.microsoft.com/office/powerpoint/2010/main" val="1102753647"/>
       </p:ext>
     </p:extLst>
   </p:cSld>
@@ -6254,7 +6773,7 @@
           <p:cNvPr id="2" name="Content Placeholder 2">
             <a:extLst xmlns:a="http://schemas.openxmlformats.org/drawingml/2006/main">
               <a:ext uri="{FF2B5EF4-FFF2-40B4-BE49-F238E27FC236}">
-                <a16:creationId xmlns:a16="http://schemas.microsoft.com/office/drawing/2014/main" id="{4F396B6D-21D9-4E32-A708-C8FF475CEC5D}"/>
+                <a16:creationId xmlns:a16="http://schemas.microsoft.com/office/drawing/2014/main" id="{EA46B63F-0CA0-40F8-8239-1DDAFF83B809}"/>
               </a:ext>
             </a:extLst>
           </p:cNvPr>
@@ -6274,7 +6793,7 @@
               <a:buNone/>
             </a:pPr>
             <a:r>
-              <a:t>Register each service in MauiProgram.</a:t>
+              <a:t>InMemoryBomService implements the contract.</a:t>
             </a:r>
           </a:p>
           <a:p xmlns:a="http://schemas.openxmlformats.org/drawingml/2006/main">
@@ -6282,7 +6801,7 @@
               <a:buNone/>
             </a:pPr>
             <a:r>
-              <a:t>The container passes dependencies to constructors.</a:t>
+              <a:t>It keeps the BOM for the current app run.</a:t>
             </a:r>
           </a:p>
         </p:txBody>
@@ -6315,7 +6834,7 @@
           <a:lstStyle xmlns:a="http://schemas.openxmlformats.org/drawingml/2006/main"/>
           <a:p xmlns:a="http://schemas.openxmlformats.org/drawingml/2006/main">
             <a:r>
-              <a:t>Step 4 Dependency injection</a:t>
+              <a:t>Step 3: In-memory service</a:t>
             </a:r>
             <a:endParaRPr/>
           </a:p>
@@ -6324,7 +6843,7 @@
     </p:spTree>
     <p:extLst>
       <p:ext uri="{BB962C8B-B14F-4D97-AF65-F5344CB8AC3E}">
-        <p14:creationId xmlns:p14="http://schemas.microsoft.com/office/powerpoint/2010/main" val="1893484101"/>
+        <p14:creationId xmlns:p14="http://schemas.microsoft.com/office/powerpoint/2010/main" val="201042961"/>
       </p:ext>
     </p:extLst>
   </p:cSld>
